--- a/Playwright & API.pptx
+++ b/Playwright & API.pptx
@@ -65,6 +65,9 @@
     <p:sldId id="313" r:id="rId59"/>
     <p:sldId id="314" r:id="rId60"/>
     <p:sldId id="315" r:id="rId61"/>
+    <p:sldId id="316" r:id="rId62"/>
+    <p:sldId id="317" r:id="rId63"/>
+    <p:sldId id="318" r:id="rId64"/>
   </p:sldIdLst>
   <p:sldSz cx="12192000" cy="6858000"/>
   <p:notesSz cx="6858000" cy="9144000"/>
@@ -174,7 +177,7 @@
 <file path=ppt/revisionInfo.xml><?xml version="1.0" encoding="utf-8"?>
 <p1510:revInfo xmlns:a="http://schemas.openxmlformats.org/drawingml/2006/main" xmlns:r="http://schemas.openxmlformats.org/officeDocument/2006/relationships" xmlns:p1510="http://schemas.microsoft.com/office/powerpoint/2015/10/main">
   <p1510:revLst>
-    <p1510:client id="{31D04B7B-443E-4FC8-BF19-DA33EC8424CB}" v="94" dt="2026-10-26T18:52:58.572"/>
+    <p1510:client id="{31D04B7B-443E-4FC8-BF19-DA33EC8424CB}" v="126" dt="2026-10-26T19:31:46.003"/>
   </p1510:revLst>
 </p1510:revInfo>
 </file>
@@ -184,7 +187,7 @@
   <pc:docChgLst>
     <pc:chgData name="harish1813@gmail.com" userId="613d342206dc88bc" providerId="LiveId" clId="{EEDAE3EB-AEB0-40E8-B4E1-1F7EDC38DCE6}"/>
     <pc:docChg chg="undo redo custSel addSld delSld modSld sldOrd">
-      <pc:chgData name="harish1813@gmail.com" userId="613d342206dc88bc" providerId="LiveId" clId="{EEDAE3EB-AEB0-40E8-B4E1-1F7EDC38DCE6}" dt="2026-10-26T18:52:58.572" v="8746"/>
+      <pc:chgData name="harish1813@gmail.com" userId="613d342206dc88bc" providerId="LiveId" clId="{EEDAE3EB-AEB0-40E8-B4E1-1F7EDC38DCE6}" dt="2026-10-26T19:32:15.161" v="9939" actId="1076"/>
       <pc:docMkLst>
         <pc:docMk/>
       </pc:docMkLst>
@@ -2258,13 +2261,13 @@
         </pc:cxnChg>
       </pc:sldChg>
       <pc:sldChg chg="addSp modSp new mod">
-        <pc:chgData name="harish1813@gmail.com" userId="613d342206dc88bc" providerId="LiveId" clId="{EEDAE3EB-AEB0-40E8-B4E1-1F7EDC38DCE6}" dt="2026-10-26T18:52:58.572" v="8746"/>
+        <pc:chgData name="harish1813@gmail.com" userId="613d342206dc88bc" providerId="LiveId" clId="{EEDAE3EB-AEB0-40E8-B4E1-1F7EDC38DCE6}" dt="2026-10-26T18:56:56.490" v="8980" actId="14100"/>
         <pc:sldMkLst>
           <pc:docMk/>
           <pc:sldMk cId="3590259156" sldId="315"/>
         </pc:sldMkLst>
         <pc:spChg chg="add mod">
-          <ac:chgData name="harish1813@gmail.com" userId="613d342206dc88bc" providerId="LiveId" clId="{EEDAE3EB-AEB0-40E8-B4E1-1F7EDC38DCE6}" dt="2026-10-26T18:52:49.029" v="8743"/>
+          <ac:chgData name="harish1813@gmail.com" userId="613d342206dc88bc" providerId="LiveId" clId="{EEDAE3EB-AEB0-40E8-B4E1-1F7EDC38DCE6}" dt="2026-10-26T18:55:08.913" v="8851"/>
           <ac:spMkLst>
             <pc:docMk/>
             <pc:sldMk cId="3590259156" sldId="315"/>
@@ -2272,13 +2275,210 @@
           </ac:spMkLst>
         </pc:spChg>
         <pc:spChg chg="add mod">
-          <ac:chgData name="harish1813@gmail.com" userId="613d342206dc88bc" providerId="LiveId" clId="{EEDAE3EB-AEB0-40E8-B4E1-1F7EDC38DCE6}" dt="2026-10-26T18:52:58.572" v="8746"/>
+          <ac:chgData name="harish1813@gmail.com" userId="613d342206dc88bc" providerId="LiveId" clId="{EEDAE3EB-AEB0-40E8-B4E1-1F7EDC38DCE6}" dt="2026-10-26T18:56:56.490" v="8980" actId="14100"/>
           <ac:spMkLst>
             <pc:docMk/>
             <pc:sldMk cId="3590259156" sldId="315"/>
             <ac:spMk id="3" creationId="{D7168417-6DBA-F353-3033-ACB842787135}"/>
           </ac:spMkLst>
         </pc:spChg>
+        <pc:cxnChg chg="add mod">
+          <ac:chgData name="harish1813@gmail.com" userId="613d342206dc88bc" providerId="LiveId" clId="{EEDAE3EB-AEB0-40E8-B4E1-1F7EDC38DCE6}" dt="2026-10-26T18:56:08.956" v="8972" actId="14100"/>
+          <ac:cxnSpMkLst>
+            <pc:docMk/>
+            <pc:sldMk cId="3590259156" sldId="315"/>
+            <ac:cxnSpMk id="5" creationId="{589BEE85-66F5-C2C4-C7A7-33A147F2734E}"/>
+          </ac:cxnSpMkLst>
+        </pc:cxnChg>
+        <pc:cxnChg chg="add">
+          <ac:chgData name="harish1813@gmail.com" userId="613d342206dc88bc" providerId="LiveId" clId="{EEDAE3EB-AEB0-40E8-B4E1-1F7EDC38DCE6}" dt="2026-10-26T18:56:14.211" v="8973" actId="11529"/>
+          <ac:cxnSpMkLst>
+            <pc:docMk/>
+            <pc:sldMk cId="3590259156" sldId="315"/>
+            <ac:cxnSpMk id="9" creationId="{64D053D0-ECFC-B1DD-B006-52C190E87776}"/>
+          </ac:cxnSpMkLst>
+        </pc:cxnChg>
+        <pc:cxnChg chg="add">
+          <ac:chgData name="harish1813@gmail.com" userId="613d342206dc88bc" providerId="LiveId" clId="{EEDAE3EB-AEB0-40E8-B4E1-1F7EDC38DCE6}" dt="2026-10-26T18:56:18.809" v="8974" actId="11529"/>
+          <ac:cxnSpMkLst>
+            <pc:docMk/>
+            <pc:sldMk cId="3590259156" sldId="315"/>
+            <ac:cxnSpMk id="11" creationId="{DA95DE78-01EB-7A30-E071-3AE89899D3AA}"/>
+          </ac:cxnSpMkLst>
+        </pc:cxnChg>
+        <pc:cxnChg chg="add">
+          <ac:chgData name="harish1813@gmail.com" userId="613d342206dc88bc" providerId="LiveId" clId="{EEDAE3EB-AEB0-40E8-B4E1-1F7EDC38DCE6}" dt="2026-10-26T18:56:25.616" v="8975" actId="11529"/>
+          <ac:cxnSpMkLst>
+            <pc:docMk/>
+            <pc:sldMk cId="3590259156" sldId="315"/>
+            <ac:cxnSpMk id="13" creationId="{431C7672-F7C0-27AF-F092-EA9541A9A155}"/>
+          </ac:cxnSpMkLst>
+        </pc:cxnChg>
+        <pc:cxnChg chg="add mod">
+          <ac:chgData name="harish1813@gmail.com" userId="613d342206dc88bc" providerId="LiveId" clId="{EEDAE3EB-AEB0-40E8-B4E1-1F7EDC38DCE6}" dt="2026-10-26T18:56:52.592" v="8979" actId="1076"/>
+          <ac:cxnSpMkLst>
+            <pc:docMk/>
+            <pc:sldMk cId="3590259156" sldId="315"/>
+            <ac:cxnSpMk id="15" creationId="{B45AEE18-F52D-1784-A19B-E5738ACACB1D}"/>
+          </ac:cxnSpMkLst>
+        </pc:cxnChg>
+      </pc:sldChg>
+      <pc:sldChg chg="addSp delSp modSp new mod">
+        <pc:chgData name="harish1813@gmail.com" userId="613d342206dc88bc" providerId="LiveId" clId="{EEDAE3EB-AEB0-40E8-B4E1-1F7EDC38DCE6}" dt="2026-10-26T19:04:43.782" v="9370" actId="1076"/>
+        <pc:sldMkLst>
+          <pc:docMk/>
+          <pc:sldMk cId="4147411865" sldId="316"/>
+        </pc:sldMkLst>
+        <pc:spChg chg="add mod">
+          <ac:chgData name="harish1813@gmail.com" userId="613d342206dc88bc" providerId="LiveId" clId="{EEDAE3EB-AEB0-40E8-B4E1-1F7EDC38DCE6}" dt="2026-10-26T19:03:11.640" v="9304" actId="20577"/>
+          <ac:spMkLst>
+            <pc:docMk/>
+            <pc:sldMk cId="4147411865" sldId="316"/>
+            <ac:spMk id="2" creationId="{2C8E8072-C8BD-94FE-D4EF-52442880DA79}"/>
+          </ac:spMkLst>
+        </pc:spChg>
+        <pc:spChg chg="add mod">
+          <ac:chgData name="harish1813@gmail.com" userId="613d342206dc88bc" providerId="LiveId" clId="{EEDAE3EB-AEB0-40E8-B4E1-1F7EDC38DCE6}" dt="2026-10-26T19:04:20.713" v="9366" actId="20577"/>
+          <ac:spMkLst>
+            <pc:docMk/>
+            <pc:sldMk cId="4147411865" sldId="316"/>
+            <ac:spMk id="4" creationId="{6DA66763-7D01-134B-D953-3AD751DDC4D4}"/>
+          </ac:spMkLst>
+        </pc:spChg>
+        <pc:spChg chg="add del">
+          <ac:chgData name="harish1813@gmail.com" userId="613d342206dc88bc" providerId="LiveId" clId="{EEDAE3EB-AEB0-40E8-B4E1-1F7EDC38DCE6}" dt="2026-10-26T19:03:25.308" v="9307" actId="478"/>
+          <ac:spMkLst>
+            <pc:docMk/>
+            <pc:sldMk cId="4147411865" sldId="316"/>
+            <ac:spMk id="9" creationId="{C67945B0-0FC2-70BF-09F0-31CDB4C96BE8}"/>
+          </ac:spMkLst>
+        </pc:spChg>
+        <pc:picChg chg="add mod">
+          <ac:chgData name="harish1813@gmail.com" userId="613d342206dc88bc" providerId="LiveId" clId="{EEDAE3EB-AEB0-40E8-B4E1-1F7EDC38DCE6}" dt="2026-10-26T19:04:43.782" v="9370" actId="1076"/>
+          <ac:picMkLst>
+            <pc:docMk/>
+            <pc:sldMk cId="4147411865" sldId="316"/>
+            <ac:picMk id="6" creationId="{39CB921B-6A72-5115-32E2-DE399A29FB85}"/>
+          </ac:picMkLst>
+        </pc:picChg>
+        <pc:picChg chg="add mod">
+          <ac:chgData name="harish1813@gmail.com" userId="613d342206dc88bc" providerId="LiveId" clId="{EEDAE3EB-AEB0-40E8-B4E1-1F7EDC38DCE6}" dt="2026-10-26T19:04:30.421" v="9367" actId="1076"/>
+          <ac:picMkLst>
+            <pc:docMk/>
+            <pc:sldMk cId="4147411865" sldId="316"/>
+            <ac:picMk id="8" creationId="{7EC3248E-4DA4-FCFF-9585-713AA6F2F4D5}"/>
+          </ac:picMkLst>
+        </pc:picChg>
+        <pc:cxnChg chg="add mod">
+          <ac:chgData name="harish1813@gmail.com" userId="613d342206dc88bc" providerId="LiveId" clId="{EEDAE3EB-AEB0-40E8-B4E1-1F7EDC38DCE6}" dt="2026-10-26T19:04:34.198" v="9368" actId="14100"/>
+          <ac:cxnSpMkLst>
+            <pc:docMk/>
+            <pc:sldMk cId="4147411865" sldId="316"/>
+            <ac:cxnSpMk id="11" creationId="{A5D9B969-56EC-5FCC-C03F-808027F28612}"/>
+          </ac:cxnSpMkLst>
+        </pc:cxnChg>
+        <pc:cxnChg chg="add">
+          <ac:chgData name="harish1813@gmail.com" userId="613d342206dc88bc" providerId="LiveId" clId="{EEDAE3EB-AEB0-40E8-B4E1-1F7EDC38DCE6}" dt="2026-10-26T19:03:34.753" v="9308" actId="11529"/>
+          <ac:cxnSpMkLst>
+            <pc:docMk/>
+            <pc:sldMk cId="4147411865" sldId="316"/>
+            <ac:cxnSpMk id="13" creationId="{7CD623CA-9CB5-A133-DB12-0F68301FCB5D}"/>
+          </ac:cxnSpMkLst>
+        </pc:cxnChg>
+      </pc:sldChg>
+      <pc:sldChg chg="addSp modSp new mod">
+        <pc:chgData name="harish1813@gmail.com" userId="613d342206dc88bc" providerId="LiveId" clId="{EEDAE3EB-AEB0-40E8-B4E1-1F7EDC38DCE6}" dt="2026-10-26T19:24:36.872" v="9657" actId="20577"/>
+        <pc:sldMkLst>
+          <pc:docMk/>
+          <pc:sldMk cId="252520861" sldId="317"/>
+        </pc:sldMkLst>
+        <pc:spChg chg="add mod">
+          <ac:chgData name="harish1813@gmail.com" userId="613d342206dc88bc" providerId="LiveId" clId="{EEDAE3EB-AEB0-40E8-B4E1-1F7EDC38DCE6}" dt="2026-10-26T19:22:38.108" v="9644" actId="14100"/>
+          <ac:spMkLst>
+            <pc:docMk/>
+            <pc:sldMk cId="252520861" sldId="317"/>
+            <ac:spMk id="2" creationId="{4D12A604-72ED-F3C1-D0A5-0119609156AA}"/>
+          </ac:spMkLst>
+        </pc:spChg>
+        <pc:spChg chg="add mod">
+          <ac:chgData name="harish1813@gmail.com" userId="613d342206dc88bc" providerId="LiveId" clId="{EEDAE3EB-AEB0-40E8-B4E1-1F7EDC38DCE6}" dt="2026-10-26T19:24:36.872" v="9657" actId="20577"/>
+          <ac:spMkLst>
+            <pc:docMk/>
+            <pc:sldMk cId="252520861" sldId="317"/>
+            <ac:spMk id="4" creationId="{41901E26-5FF9-7371-8F57-F3A3CD1D76D9}"/>
+          </ac:spMkLst>
+        </pc:spChg>
+        <pc:cxnChg chg="add">
+          <ac:chgData name="harish1813@gmail.com" userId="613d342206dc88bc" providerId="LiveId" clId="{EEDAE3EB-AEB0-40E8-B4E1-1F7EDC38DCE6}" dt="2026-10-26T19:22:44.866" v="9645" actId="11529"/>
+          <ac:cxnSpMkLst>
+            <pc:docMk/>
+            <pc:sldMk cId="252520861" sldId="317"/>
+            <ac:cxnSpMk id="6" creationId="{CC6047EC-4CDA-F3F7-6C5C-A396CAB93B62}"/>
+          </ac:cxnSpMkLst>
+        </pc:cxnChg>
+        <pc:cxnChg chg="add mod">
+          <ac:chgData name="harish1813@gmail.com" userId="613d342206dc88bc" providerId="LiveId" clId="{EEDAE3EB-AEB0-40E8-B4E1-1F7EDC38DCE6}" dt="2026-10-26T19:23:12.327" v="9649" actId="14100"/>
+          <ac:cxnSpMkLst>
+            <pc:docMk/>
+            <pc:sldMk cId="252520861" sldId="317"/>
+            <ac:cxnSpMk id="7" creationId="{E773E1D7-D9D1-3046-F5BF-031477599371}"/>
+          </ac:cxnSpMkLst>
+        </pc:cxnChg>
+        <pc:cxnChg chg="add">
+          <ac:chgData name="harish1813@gmail.com" userId="613d342206dc88bc" providerId="LiveId" clId="{EEDAE3EB-AEB0-40E8-B4E1-1F7EDC38DCE6}" dt="2026-10-26T19:23:23.059" v="9650" actId="11529"/>
+          <ac:cxnSpMkLst>
+            <pc:docMk/>
+            <pc:sldMk cId="252520861" sldId="317"/>
+            <ac:cxnSpMk id="10" creationId="{AEA5D7C6-2C07-B9F4-9148-4ABF3AE7861A}"/>
+          </ac:cxnSpMkLst>
+        </pc:cxnChg>
+        <pc:cxnChg chg="add">
+          <ac:chgData name="harish1813@gmail.com" userId="613d342206dc88bc" providerId="LiveId" clId="{EEDAE3EB-AEB0-40E8-B4E1-1F7EDC38DCE6}" dt="2026-10-26T19:23:28.031" v="9651" actId="11529"/>
+          <ac:cxnSpMkLst>
+            <pc:docMk/>
+            <pc:sldMk cId="252520861" sldId="317"/>
+            <ac:cxnSpMk id="12" creationId="{0B53CCE5-13CD-795C-ECE1-3E5DBA35FBF2}"/>
+          </ac:cxnSpMkLst>
+        </pc:cxnChg>
+        <pc:cxnChg chg="add">
+          <ac:chgData name="harish1813@gmail.com" userId="613d342206dc88bc" providerId="LiveId" clId="{EEDAE3EB-AEB0-40E8-B4E1-1F7EDC38DCE6}" dt="2026-10-26T19:23:34.217" v="9652" actId="11529"/>
+          <ac:cxnSpMkLst>
+            <pc:docMk/>
+            <pc:sldMk cId="252520861" sldId="317"/>
+            <ac:cxnSpMk id="14" creationId="{E3631377-D336-A621-E950-3510259DD6E6}"/>
+          </ac:cxnSpMkLst>
+        </pc:cxnChg>
+      </pc:sldChg>
+      <pc:sldChg chg="addSp modSp new mod">
+        <pc:chgData name="harish1813@gmail.com" userId="613d342206dc88bc" providerId="LiveId" clId="{EEDAE3EB-AEB0-40E8-B4E1-1F7EDC38DCE6}" dt="2026-10-26T19:32:15.161" v="9939" actId="1076"/>
+        <pc:sldMkLst>
+          <pc:docMk/>
+          <pc:sldMk cId="492793201" sldId="318"/>
+        </pc:sldMkLst>
+        <pc:spChg chg="add mod">
+          <ac:chgData name="harish1813@gmail.com" userId="613d342206dc88bc" providerId="LiveId" clId="{EEDAE3EB-AEB0-40E8-B4E1-1F7EDC38DCE6}" dt="2026-10-26T19:32:01.671" v="9937" actId="20577"/>
+          <ac:spMkLst>
+            <pc:docMk/>
+            <pc:sldMk cId="492793201" sldId="318"/>
+            <ac:spMk id="2" creationId="{C1585664-8AB7-805E-85D5-390FAE6DD8B8}"/>
+          </ac:spMkLst>
+        </pc:spChg>
+        <pc:spChg chg="add mod">
+          <ac:chgData name="harish1813@gmail.com" userId="613d342206dc88bc" providerId="LiveId" clId="{EEDAE3EB-AEB0-40E8-B4E1-1F7EDC38DCE6}" dt="2026-10-26T19:31:56.429" v="9928" actId="20577"/>
+          <ac:spMkLst>
+            <pc:docMk/>
+            <pc:sldMk cId="492793201" sldId="318"/>
+            <ac:spMk id="3" creationId="{F5D424FE-8A2C-B00D-3A7F-7D92A107C998}"/>
+          </ac:spMkLst>
+        </pc:spChg>
+        <pc:graphicFrameChg chg="add mod modGraphic">
+          <ac:chgData name="harish1813@gmail.com" userId="613d342206dc88bc" providerId="LiveId" clId="{EEDAE3EB-AEB0-40E8-B4E1-1F7EDC38DCE6}" dt="2026-10-26T19:32:15.161" v="9939" actId="1076"/>
+          <ac:graphicFrameMkLst>
+            <pc:docMk/>
+            <pc:sldMk cId="492793201" sldId="318"/>
+            <ac:graphicFrameMk id="4" creationId="{04C91345-727C-F04C-BE6A-6DBD3A1AD73E}"/>
+          </ac:graphicFrameMkLst>
+        </pc:graphicFrameChg>
       </pc:sldChg>
     </pc:docChg>
   </pc:docChgLst>
@@ -40939,6 +41139,27 @@
               <a:rPr lang="fr-FR" dirty="0"/>
               <a:t> .</a:t>
             </a:r>
+            <a:br>
+              <a:rPr lang="fr-FR" dirty="0"/>
+            </a:br>
+            <a:br>
+              <a:rPr lang="fr-FR" dirty="0"/>
+            </a:br>
+            <a:r>
+              <a:rPr lang="en-US" dirty="0"/>
+              <a:t>git commit -m "Initial commit“</a:t>
+            </a:r>
+            <a:br>
+              <a:rPr lang="en-US" dirty="0"/>
+            </a:br>
+            <a:br>
+              <a:rPr lang="en-US" dirty="0"/>
+            </a:br>
+            <a:r>
+              <a:rPr lang="en-US" dirty="0"/>
+              <a:t>git branch</a:t>
+            </a:r>
+            <a:endParaRPr lang="fr-FR" dirty="0"/>
           </a:p>
         </p:txBody>
       </p:sp>
@@ -41133,10 +41354,137 @@
               <a:t>pannum</a:t>
             </a:r>
             <a:r>
-              <a:rPr lang="en-US"/>
+              <a:rPr lang="en-US" dirty="0"/>
+              <a:t>. git add . </a:t>
+            </a:r>
+            <a:r>
+              <a:rPr lang="en-US" dirty="0" err="1"/>
+              <a:t>Kudutha</a:t>
+            </a:r>
+            <a:r>
+              <a:rPr lang="en-US" dirty="0"/>
+              <a:t> </a:t>
+            </a:r>
+            <a:r>
+              <a:rPr lang="en-US" dirty="0" err="1"/>
+              <a:t>ellam</a:t>
+            </a:r>
+            <a:r>
+              <a:rPr lang="en-US" dirty="0"/>
+              <a:t> files staging area </a:t>
+            </a:r>
+            <a:r>
+              <a:rPr lang="en-US" dirty="0" err="1"/>
+              <a:t>ku</a:t>
+            </a:r>
+            <a:r>
+              <a:rPr lang="en-US" dirty="0"/>
+              <a:t> move </a:t>
+            </a:r>
+            <a:r>
+              <a:rPr lang="en-US" dirty="0" err="1"/>
+              <a:t>aaitu</a:t>
+            </a:r>
+            <a:r>
+              <a:rPr lang="en-US" dirty="0"/>
+              <a:t> side la files la A nu </a:t>
+            </a:r>
+            <a:r>
+              <a:rPr lang="en-US" dirty="0" err="1"/>
+              <a:t>kaatum</a:t>
+            </a:r>
+            <a:r>
+              <a:rPr lang="en-US" dirty="0"/>
+              <a:t> like added</a:t>
+            </a:r>
+            <a:br>
+              <a:rPr lang="en-US" dirty="0"/>
+            </a:br>
+            <a:br>
+              <a:rPr lang="en-US" dirty="0"/>
+            </a:br>
+            <a:r>
+              <a:rPr lang="en-US" dirty="0"/>
+              <a:t>Staged files-</a:t>
+            </a:r>
+            <a:r>
+              <a:rPr lang="en-US" dirty="0" err="1"/>
+              <a:t>oda</a:t>
+            </a:r>
+            <a:r>
+              <a:rPr lang="en-US" dirty="0"/>
+              <a:t> snapshot create </a:t>
+            </a:r>
+            <a:r>
+              <a:rPr lang="en-US" dirty="0" err="1"/>
+              <a:t>aagum</a:t>
+            </a:r>
+            <a:r>
+              <a:rPr lang="en-US" dirty="0"/>
               <a:t>.</a:t>
             </a:r>
-            <a:endParaRPr lang="en-US" dirty="0"/>
+            <a:br>
+              <a:rPr lang="en-US" dirty="0"/>
+            </a:br>
+            <a:br>
+              <a:rPr lang="en-US" dirty="0"/>
+            </a:br>
+            <a:r>
+              <a:rPr lang="en-US" dirty="0" err="1"/>
+              <a:t>Ippa</a:t>
+            </a:r>
+            <a:r>
+              <a:rPr lang="en-US" dirty="0"/>
+              <a:t> git branch nu </a:t>
+            </a:r>
+            <a:r>
+              <a:rPr lang="en-US" dirty="0" err="1"/>
+              <a:t>kudutha</a:t>
+            </a:r>
+            <a:r>
+              <a:rPr lang="en-US" dirty="0"/>
+              <a:t> master nu </a:t>
+            </a:r>
+            <a:r>
+              <a:rPr lang="en-US" dirty="0" err="1"/>
+              <a:t>kaatum</a:t>
+            </a:r>
+            <a:r>
+              <a:rPr lang="en-US" dirty="0"/>
+              <a:t> </a:t>
+            </a:r>
+            <a:r>
+              <a:rPr lang="en-US" dirty="0" err="1"/>
+              <a:t>apparam</a:t>
+            </a:r>
+            <a:r>
+              <a:rPr lang="en-US" dirty="0"/>
+              <a:t> </a:t>
+            </a:r>
+            <a:r>
+              <a:rPr lang="en-US" dirty="0" err="1"/>
+              <a:t>ni</a:t>
+            </a:r>
+            <a:r>
+              <a:rPr lang="en-US" dirty="0"/>
+              <a:t> status </a:t>
+            </a:r>
+            <a:r>
+              <a:rPr lang="en-US" dirty="0" err="1"/>
+              <a:t>kuda</a:t>
+            </a:r>
+            <a:r>
+              <a:rPr lang="en-US" dirty="0"/>
+              <a:t> check </a:t>
+            </a:r>
+            <a:r>
+              <a:rPr lang="en-US" dirty="0" err="1"/>
+              <a:t>pannikulam</a:t>
+            </a:r>
+            <a:r>
+              <a:rPr lang="en-US" dirty="0"/>
+              <a:t> all files will be tracked</a:t>
+            </a:r>
           </a:p>
           <a:p>
             <a:pPr algn="ctr"/>
@@ -41152,10 +41500,2001 @@
           </a:p>
         </p:txBody>
       </p:sp>
+      <p:cxnSp>
+        <p:nvCxnSpPr>
+          <p:cNvPr id="5" name="Straight Arrow Connector 4">
+            <a:extLst>
+              <a:ext uri="{FF2B5EF4-FFF2-40B4-BE49-F238E27FC236}">
+                <a16:creationId xmlns:a16="http://schemas.microsoft.com/office/drawing/2014/main" id="{589BEE85-66F5-C2C4-C7A7-33A147F2734E}"/>
+              </a:ext>
+            </a:extLst>
+          </p:cNvPr>
+          <p:cNvCxnSpPr>
+            <a:cxnSpLocks/>
+          </p:cNvCxnSpPr>
+          <p:nvPr/>
+        </p:nvCxnSpPr>
+        <p:spPr>
+          <a:xfrm flipV="1">
+            <a:off x="4241800" y="922867"/>
+            <a:ext cx="3725333" cy="1219200"/>
+          </a:xfrm>
+          <a:prstGeom prst="straightConnector1">
+            <a:avLst/>
+          </a:prstGeom>
+          <a:ln>
+            <a:tailEnd type="triangle"/>
+          </a:ln>
+        </p:spPr>
+        <p:style>
+          <a:lnRef idx="2">
+            <a:schemeClr val="accent1"/>
+          </a:lnRef>
+          <a:fillRef idx="0">
+            <a:schemeClr val="accent1"/>
+          </a:fillRef>
+          <a:effectRef idx="1">
+            <a:schemeClr val="accent1"/>
+          </a:effectRef>
+          <a:fontRef idx="minor">
+            <a:schemeClr val="tx1"/>
+          </a:fontRef>
+        </p:style>
+      </p:cxnSp>
+      <p:cxnSp>
+        <p:nvCxnSpPr>
+          <p:cNvPr id="9" name="Straight Arrow Connector 8">
+            <a:extLst>
+              <a:ext uri="{FF2B5EF4-FFF2-40B4-BE49-F238E27FC236}">
+                <a16:creationId xmlns:a16="http://schemas.microsoft.com/office/drawing/2014/main" id="{64D053D0-ECFC-B1DD-B006-52C190E87776}"/>
+              </a:ext>
+            </a:extLst>
+          </p:cNvPr>
+          <p:cNvCxnSpPr/>
+          <p:nvPr/>
+        </p:nvCxnSpPr>
+        <p:spPr>
+          <a:xfrm flipV="1">
+            <a:off x="4131733" y="2286000"/>
+            <a:ext cx="3801534" cy="601133"/>
+          </a:xfrm>
+          <a:prstGeom prst="straightConnector1">
+            <a:avLst/>
+          </a:prstGeom>
+          <a:ln>
+            <a:tailEnd type="triangle"/>
+          </a:ln>
+        </p:spPr>
+        <p:style>
+          <a:lnRef idx="2">
+            <a:schemeClr val="accent1"/>
+          </a:lnRef>
+          <a:fillRef idx="0">
+            <a:schemeClr val="accent1"/>
+          </a:fillRef>
+          <a:effectRef idx="1">
+            <a:schemeClr val="accent1"/>
+          </a:effectRef>
+          <a:fontRef idx="minor">
+            <a:schemeClr val="tx1"/>
+          </a:fontRef>
+        </p:style>
+      </p:cxnSp>
+      <p:cxnSp>
+        <p:nvCxnSpPr>
+          <p:cNvPr id="11" name="Straight Arrow Connector 10">
+            <a:extLst>
+              <a:ext uri="{FF2B5EF4-FFF2-40B4-BE49-F238E27FC236}">
+                <a16:creationId xmlns:a16="http://schemas.microsoft.com/office/drawing/2014/main" id="{DA95DE78-01EB-7A30-E071-3AE89899D3AA}"/>
+              </a:ext>
+            </a:extLst>
+          </p:cNvPr>
+          <p:cNvCxnSpPr/>
+          <p:nvPr/>
+        </p:nvCxnSpPr>
+        <p:spPr>
+          <a:xfrm flipV="1">
+            <a:off x="3666067" y="3470148"/>
+            <a:ext cx="4301066" cy="136652"/>
+          </a:xfrm>
+          <a:prstGeom prst="straightConnector1">
+            <a:avLst/>
+          </a:prstGeom>
+          <a:ln>
+            <a:tailEnd type="triangle"/>
+          </a:ln>
+        </p:spPr>
+        <p:style>
+          <a:lnRef idx="2">
+            <a:schemeClr val="accent1"/>
+          </a:lnRef>
+          <a:fillRef idx="0">
+            <a:schemeClr val="accent1"/>
+          </a:fillRef>
+          <a:effectRef idx="1">
+            <a:schemeClr val="accent1"/>
+          </a:effectRef>
+          <a:fontRef idx="minor">
+            <a:schemeClr val="tx1"/>
+          </a:fontRef>
+        </p:style>
+      </p:cxnSp>
+      <p:cxnSp>
+        <p:nvCxnSpPr>
+          <p:cNvPr id="13" name="Straight Arrow Connector 12">
+            <a:extLst>
+              <a:ext uri="{FF2B5EF4-FFF2-40B4-BE49-F238E27FC236}">
+                <a16:creationId xmlns:a16="http://schemas.microsoft.com/office/drawing/2014/main" id="{431C7672-F7C0-27AF-F092-EA9541A9A155}"/>
+              </a:ext>
+            </a:extLst>
+          </p:cNvPr>
+          <p:cNvCxnSpPr/>
+          <p:nvPr/>
+        </p:nvCxnSpPr>
+        <p:spPr>
+          <a:xfrm>
+            <a:off x="4605867" y="4157133"/>
+            <a:ext cx="3361266" cy="550334"/>
+          </a:xfrm>
+          <a:prstGeom prst="straightConnector1">
+            <a:avLst/>
+          </a:prstGeom>
+          <a:ln>
+            <a:tailEnd type="triangle"/>
+          </a:ln>
+        </p:spPr>
+        <p:style>
+          <a:lnRef idx="2">
+            <a:schemeClr val="accent1"/>
+          </a:lnRef>
+          <a:fillRef idx="0">
+            <a:schemeClr val="accent1"/>
+          </a:fillRef>
+          <a:effectRef idx="1">
+            <a:schemeClr val="accent1"/>
+          </a:effectRef>
+          <a:fontRef idx="minor">
+            <a:schemeClr val="tx1"/>
+          </a:fontRef>
+        </p:style>
+      </p:cxnSp>
+      <p:cxnSp>
+        <p:nvCxnSpPr>
+          <p:cNvPr id="15" name="Straight Arrow Connector 14">
+            <a:extLst>
+              <a:ext uri="{FF2B5EF4-FFF2-40B4-BE49-F238E27FC236}">
+                <a16:creationId xmlns:a16="http://schemas.microsoft.com/office/drawing/2014/main" id="{B45AEE18-F52D-1784-A19B-E5738ACACB1D}"/>
+              </a:ext>
+            </a:extLst>
+          </p:cNvPr>
+          <p:cNvCxnSpPr/>
+          <p:nvPr/>
+        </p:nvCxnSpPr>
+        <p:spPr>
+          <a:xfrm>
+            <a:off x="3666067" y="4690533"/>
+            <a:ext cx="4301066" cy="592667"/>
+          </a:xfrm>
+          <a:prstGeom prst="straightConnector1">
+            <a:avLst/>
+          </a:prstGeom>
+          <a:ln>
+            <a:tailEnd type="triangle"/>
+          </a:ln>
+        </p:spPr>
+        <p:style>
+          <a:lnRef idx="2">
+            <a:schemeClr val="accent1"/>
+          </a:lnRef>
+          <a:fillRef idx="0">
+            <a:schemeClr val="accent1"/>
+          </a:fillRef>
+          <a:effectRef idx="1">
+            <a:schemeClr val="accent1"/>
+          </a:effectRef>
+          <a:fontRef idx="minor">
+            <a:schemeClr val="tx1"/>
+          </a:fontRef>
+        </p:style>
+      </p:cxnSp>
     </p:spTree>
     <p:extLst>
       <p:ext uri="{BB962C8B-B14F-4D97-AF65-F5344CB8AC3E}">
         <p14:creationId xmlns:p14="http://schemas.microsoft.com/office/powerpoint/2010/main" val="3590259156"/>
+      </p:ext>
+    </p:extLst>
+  </p:cSld>
+  <p:clrMapOvr>
+    <a:masterClrMapping/>
+  </p:clrMapOvr>
+</p:sld>
+</file>
+
+<file path=ppt/slides/slide61.xml><?xml version="1.0" encoding="utf-8"?>
+<p:sld xmlns:a="http://schemas.openxmlformats.org/drawingml/2006/main" xmlns:r="http://schemas.openxmlformats.org/officeDocument/2006/relationships" xmlns:p="http://schemas.openxmlformats.org/presentationml/2006/main">
+  <p:cSld>
+    <p:spTree>
+      <p:nvGrpSpPr>
+        <p:cNvPr id="1" name=""/>
+        <p:cNvGrpSpPr/>
+        <p:nvPr/>
+      </p:nvGrpSpPr>
+      <p:grpSpPr>
+        <a:xfrm>
+          <a:off x="0" y="0"/>
+          <a:ext cx="0" cy="0"/>
+          <a:chOff x="0" y="0"/>
+          <a:chExt cx="0" cy="0"/>
+        </a:xfrm>
+      </p:grpSpPr>
+      <p:sp>
+        <p:nvSpPr>
+          <p:cNvPr id="2" name="Rectangle 1">
+            <a:extLst>
+              <a:ext uri="{FF2B5EF4-FFF2-40B4-BE49-F238E27FC236}">
+                <a16:creationId xmlns:a16="http://schemas.microsoft.com/office/drawing/2014/main" id="{2C8E8072-C8BD-94FE-D4EF-52442880DA79}"/>
+              </a:ext>
+            </a:extLst>
+          </p:cNvPr>
+          <p:cNvSpPr/>
+          <p:nvPr/>
+        </p:nvSpPr>
+        <p:spPr>
+          <a:xfrm>
+            <a:off x="414867" y="220133"/>
+            <a:ext cx="5020733" cy="5833534"/>
+          </a:xfrm>
+          <a:prstGeom prst="rect">
+            <a:avLst/>
+          </a:prstGeom>
+        </p:spPr>
+        <p:style>
+          <a:lnRef idx="2">
+            <a:schemeClr val="accent6"/>
+          </a:lnRef>
+          <a:fillRef idx="1">
+            <a:schemeClr val="lt1"/>
+          </a:fillRef>
+          <a:effectRef idx="0">
+            <a:schemeClr val="accent6"/>
+          </a:effectRef>
+          <a:fontRef idx="minor">
+            <a:schemeClr val="dk1"/>
+          </a:fontRef>
+        </p:style>
+        <p:txBody>
+          <a:bodyPr rtlCol="0" anchor="ctr"/>
+          <a:lstStyle/>
+          <a:p>
+            <a:pPr algn="ctr"/>
+            <a:r>
+              <a:rPr lang="en-US" dirty="0"/>
+              <a:t>git remote add origin &lt;GitHub-repository-URL&gt;</a:t>
+            </a:r>
+          </a:p>
+          <a:p>
+            <a:pPr algn="ctr"/>
+            <a:br>
+              <a:rPr lang="en-US" dirty="0"/>
+            </a:br>
+            <a:br>
+              <a:rPr lang="en-US" dirty="0"/>
+            </a:br>
+            <a:r>
+              <a:rPr lang="en-US" dirty="0"/>
+              <a:t>git remote add origin </a:t>
+            </a:r>
+            <a:r>
+              <a:rPr lang="en-US" dirty="0">
+                <a:hlinkClick r:id="rId2"/>
+              </a:rPr>
+              <a:t>https://github.com/Harish18131989/gitfinalcompanyplay.git</a:t>
+            </a:r>
+            <a:endParaRPr lang="en-US" dirty="0"/>
+          </a:p>
+          <a:p>
+            <a:pPr algn="ctr"/>
+            <a:endParaRPr lang="en-US" dirty="0"/>
+          </a:p>
+          <a:p>
+            <a:pPr algn="ctr"/>
+            <a:r>
+              <a:rPr lang="en-US" dirty="0"/>
+              <a:t>git remote –v</a:t>
+            </a:r>
+          </a:p>
+          <a:p>
+            <a:pPr algn="ctr"/>
+            <a:endParaRPr lang="en-US" dirty="0"/>
+          </a:p>
+          <a:p>
+            <a:pPr algn="ctr"/>
+            <a:endParaRPr lang="en-US" dirty="0"/>
+          </a:p>
+        </p:txBody>
+      </p:sp>
+      <p:sp>
+        <p:nvSpPr>
+          <p:cNvPr id="4" name="Rectangle 3">
+            <a:extLst>
+              <a:ext uri="{FF2B5EF4-FFF2-40B4-BE49-F238E27FC236}">
+                <a16:creationId xmlns:a16="http://schemas.microsoft.com/office/drawing/2014/main" id="{6DA66763-7D01-134B-D953-3AD751DDC4D4}"/>
+              </a:ext>
+            </a:extLst>
+          </p:cNvPr>
+          <p:cNvSpPr/>
+          <p:nvPr/>
+        </p:nvSpPr>
+        <p:spPr>
+          <a:xfrm>
+            <a:off x="5579534" y="220133"/>
+            <a:ext cx="6333066" cy="5833534"/>
+          </a:xfrm>
+          <a:prstGeom prst="rect">
+            <a:avLst/>
+          </a:prstGeom>
+        </p:spPr>
+        <p:style>
+          <a:lnRef idx="2">
+            <a:schemeClr val="accent6"/>
+          </a:lnRef>
+          <a:fillRef idx="1">
+            <a:schemeClr val="lt1"/>
+          </a:fillRef>
+          <a:effectRef idx="0">
+            <a:schemeClr val="accent6"/>
+          </a:effectRef>
+          <a:fontRef idx="minor">
+            <a:schemeClr val="dk1"/>
+          </a:fontRef>
+        </p:style>
+        <p:txBody>
+          <a:bodyPr rtlCol="0" anchor="ctr"/>
+          <a:lstStyle/>
+          <a:p>
+            <a:pPr algn="ctr"/>
+            <a:r>
+              <a:rPr lang="en-US" dirty="0" err="1"/>
+              <a:t>Ippa</a:t>
+            </a:r>
+            <a:r>
+              <a:rPr lang="en-US" dirty="0"/>
+              <a:t> </a:t>
+            </a:r>
+            <a:r>
+              <a:rPr lang="en-US" dirty="0" err="1"/>
+              <a:t>namma</a:t>
+            </a:r>
+            <a:r>
+              <a:rPr lang="en-US" dirty="0"/>
+              <a:t> local la </a:t>
+            </a:r>
+            <a:r>
+              <a:rPr lang="en-US" dirty="0" err="1"/>
+              <a:t>irundha</a:t>
+            </a:r>
+            <a:r>
+              <a:rPr lang="en-US" dirty="0"/>
+              <a:t> files staging </a:t>
+            </a:r>
+            <a:r>
+              <a:rPr lang="en-US" dirty="0" err="1"/>
+              <a:t>ku</a:t>
+            </a:r>
+            <a:r>
+              <a:rPr lang="en-US" dirty="0"/>
+              <a:t> move panni snap shot um </a:t>
+            </a:r>
+            <a:r>
+              <a:rPr lang="en-US" dirty="0" err="1"/>
+              <a:t>eduthitom</a:t>
+            </a:r>
+            <a:r>
+              <a:rPr lang="en-US" dirty="0"/>
+              <a:t> </a:t>
+            </a:r>
+            <a:r>
+              <a:rPr lang="en-US" dirty="0" err="1"/>
+              <a:t>adhuku</a:t>
+            </a:r>
+            <a:r>
+              <a:rPr lang="en-US" dirty="0"/>
+              <a:t> </a:t>
+            </a:r>
+            <a:r>
+              <a:rPr lang="en-US" dirty="0" err="1"/>
+              <a:t>apparam</a:t>
+            </a:r>
+            <a:r>
+              <a:rPr lang="en-US" dirty="0"/>
+              <a:t> global repo </a:t>
+            </a:r>
+            <a:r>
+              <a:rPr lang="en-US" dirty="0" err="1"/>
+              <a:t>ku</a:t>
+            </a:r>
+            <a:r>
+              <a:rPr lang="en-US" dirty="0"/>
+              <a:t> move </a:t>
+            </a:r>
+            <a:r>
+              <a:rPr lang="en-US" dirty="0" err="1"/>
+              <a:t>pannanum</a:t>
+            </a:r>
+            <a:r>
+              <a:rPr lang="en-US" dirty="0"/>
+              <a:t> </a:t>
+            </a:r>
+            <a:r>
+              <a:rPr lang="en-US" dirty="0" err="1"/>
+              <a:t>adhuku</a:t>
+            </a:r>
+            <a:r>
+              <a:rPr lang="en-US" dirty="0"/>
+              <a:t> </a:t>
+            </a:r>
+            <a:r>
+              <a:rPr lang="en-US" dirty="0" err="1"/>
+              <a:t>namma</a:t>
+            </a:r>
+            <a:r>
+              <a:rPr lang="en-US" dirty="0"/>
+              <a:t> global repo </a:t>
+            </a:r>
+            <a:r>
+              <a:rPr lang="en-US" dirty="0" err="1"/>
+              <a:t>url</a:t>
+            </a:r>
+            <a:r>
+              <a:rPr lang="en-US" dirty="0"/>
+              <a:t> </a:t>
+            </a:r>
+            <a:r>
+              <a:rPr lang="en-US" dirty="0" err="1"/>
+              <a:t>oda</a:t>
+            </a:r>
+            <a:r>
+              <a:rPr lang="en-US" dirty="0"/>
+              <a:t> connect </a:t>
+            </a:r>
+            <a:r>
+              <a:rPr lang="en-US" dirty="0" err="1"/>
+              <a:t>pannanum</a:t>
+            </a:r>
+            <a:r>
+              <a:rPr lang="en-US" dirty="0"/>
+              <a:t> </a:t>
+            </a:r>
+            <a:r>
+              <a:rPr lang="en-US" dirty="0" err="1"/>
+              <a:t>idhuku</a:t>
+            </a:r>
+            <a:r>
+              <a:rPr lang="en-US" dirty="0"/>
+              <a:t> </a:t>
+            </a:r>
+            <a:r>
+              <a:rPr lang="en-US" dirty="0" err="1"/>
+              <a:t>github</a:t>
+            </a:r>
+            <a:r>
+              <a:rPr lang="en-US" dirty="0"/>
+              <a:t> login panni new repo nu </a:t>
+            </a:r>
+            <a:r>
+              <a:rPr lang="en-US" dirty="0" err="1"/>
+              <a:t>kuduthu</a:t>
+            </a:r>
+            <a:r>
+              <a:rPr lang="en-US" dirty="0"/>
+              <a:t> </a:t>
+            </a:r>
+            <a:r>
+              <a:rPr lang="en-US" dirty="0" err="1"/>
+              <a:t>adhuku</a:t>
+            </a:r>
+            <a:r>
+              <a:rPr lang="en-US" dirty="0"/>
+              <a:t> </a:t>
+            </a:r>
+            <a:r>
+              <a:rPr lang="en-US" dirty="0" err="1"/>
+              <a:t>oru</a:t>
+            </a:r>
+            <a:r>
+              <a:rPr lang="en-US" dirty="0"/>
+              <a:t> name </a:t>
+            </a:r>
+            <a:r>
+              <a:rPr lang="en-US" dirty="0" err="1"/>
+              <a:t>kuduthu</a:t>
+            </a:r>
+            <a:r>
+              <a:rPr lang="en-US" dirty="0"/>
+              <a:t> </a:t>
+            </a:r>
+            <a:r>
+              <a:rPr lang="en-US" dirty="0" err="1"/>
+              <a:t>adha</a:t>
+            </a:r>
+            <a:r>
+              <a:rPr lang="en-US" dirty="0"/>
+              <a:t> terminal run </a:t>
+            </a:r>
+            <a:r>
+              <a:rPr lang="en-US" dirty="0" err="1"/>
+              <a:t>pannuvom</a:t>
+            </a:r>
+            <a:endParaRPr lang="en-US" dirty="0"/>
+          </a:p>
+          <a:p>
+            <a:pPr algn="ctr"/>
+            <a:endParaRPr lang="en-US" dirty="0"/>
+          </a:p>
+          <a:p>
+            <a:pPr algn="ctr"/>
+            <a:endParaRPr lang="en-US" dirty="0"/>
+          </a:p>
+          <a:p>
+            <a:pPr algn="ctr"/>
+            <a:r>
+              <a:rPr lang="en-US" dirty="0" err="1"/>
+              <a:t>Ippadi</a:t>
+            </a:r>
+            <a:r>
+              <a:rPr lang="en-US" dirty="0"/>
+              <a:t> </a:t>
+            </a:r>
+            <a:r>
+              <a:rPr lang="en-US" dirty="0" err="1"/>
+              <a:t>kudukiradhala</a:t>
+            </a:r>
+            <a:r>
+              <a:rPr lang="en-US" dirty="0"/>
+              <a:t> we can see where our repo is</a:t>
+            </a:r>
+            <a:br>
+              <a:rPr lang="en-US" dirty="0"/>
+            </a:br>
+            <a:r>
+              <a:rPr lang="en-US" dirty="0"/>
+              <a:t>origin  https://github.com/Harish18131989/gitfinalcompanyplay.git (fetch)</a:t>
+            </a:r>
+          </a:p>
+          <a:p>
+            <a:pPr algn="ctr"/>
+            <a:r>
+              <a:rPr lang="en-US" dirty="0"/>
+              <a:t>origin  https://github.com/Harish18131989/gitfinalcompanyplay.git (push)</a:t>
+            </a:r>
+          </a:p>
+        </p:txBody>
+      </p:sp>
+      <p:pic>
+        <p:nvPicPr>
+          <p:cNvPr id="6" name="Picture 5">
+            <a:extLst>
+              <a:ext uri="{FF2B5EF4-FFF2-40B4-BE49-F238E27FC236}">
+                <a16:creationId xmlns:a16="http://schemas.microsoft.com/office/drawing/2014/main" id="{39CB921B-6A72-5115-32E2-DE399A29FB85}"/>
+              </a:ext>
+            </a:extLst>
+          </p:cNvPr>
+          <p:cNvPicPr>
+            <a:picLocks noChangeAspect="1"/>
+          </p:cNvPicPr>
+          <p:nvPr/>
+        </p:nvPicPr>
+        <p:blipFill>
+          <a:blip r:embed="rId3"/>
+          <a:stretch>
+            <a:fillRect/>
+          </a:stretch>
+        </p:blipFill>
+        <p:spPr>
+          <a:xfrm>
+            <a:off x="2302933" y="291184"/>
+            <a:ext cx="1701800" cy="1360031"/>
+          </a:xfrm>
+          <a:prstGeom prst="rect">
+            <a:avLst/>
+          </a:prstGeom>
+        </p:spPr>
+      </p:pic>
+      <p:pic>
+        <p:nvPicPr>
+          <p:cNvPr id="8" name="Picture 7">
+            <a:extLst>
+              <a:ext uri="{FF2B5EF4-FFF2-40B4-BE49-F238E27FC236}">
+                <a16:creationId xmlns:a16="http://schemas.microsoft.com/office/drawing/2014/main" id="{7EC3248E-4DA4-FCFF-9585-713AA6F2F4D5}"/>
+              </a:ext>
+            </a:extLst>
+          </p:cNvPr>
+          <p:cNvPicPr>
+            <a:picLocks noChangeAspect="1"/>
+          </p:cNvPicPr>
+          <p:nvPr/>
+        </p:nvPicPr>
+        <p:blipFill>
+          <a:blip r:embed="rId4"/>
+          <a:stretch>
+            <a:fillRect/>
+          </a:stretch>
+        </p:blipFill>
+        <p:spPr>
+          <a:xfrm>
+            <a:off x="643467" y="4955467"/>
+            <a:ext cx="11133666" cy="1417933"/>
+          </a:xfrm>
+          <a:prstGeom prst="rect">
+            <a:avLst/>
+          </a:prstGeom>
+        </p:spPr>
+      </p:pic>
+      <p:cxnSp>
+        <p:nvCxnSpPr>
+          <p:cNvPr id="11" name="Straight Arrow Connector 10">
+            <a:extLst>
+              <a:ext uri="{FF2B5EF4-FFF2-40B4-BE49-F238E27FC236}">
+                <a16:creationId xmlns:a16="http://schemas.microsoft.com/office/drawing/2014/main" id="{A5D9B969-56EC-5FCC-C03F-808027F28612}"/>
+              </a:ext>
+            </a:extLst>
+          </p:cNvPr>
+          <p:cNvCxnSpPr>
+            <a:cxnSpLocks/>
+          </p:cNvCxnSpPr>
+          <p:nvPr/>
+        </p:nvCxnSpPr>
+        <p:spPr>
+          <a:xfrm flipV="1">
+            <a:off x="4004733" y="1930400"/>
+            <a:ext cx="1803400" cy="812800"/>
+          </a:xfrm>
+          <a:prstGeom prst="straightConnector1">
+            <a:avLst/>
+          </a:prstGeom>
+          <a:ln>
+            <a:tailEnd type="triangle"/>
+          </a:ln>
+        </p:spPr>
+        <p:style>
+          <a:lnRef idx="2">
+            <a:schemeClr val="accent1"/>
+          </a:lnRef>
+          <a:fillRef idx="0">
+            <a:schemeClr val="accent1"/>
+          </a:fillRef>
+          <a:effectRef idx="1">
+            <a:schemeClr val="accent1"/>
+          </a:effectRef>
+          <a:fontRef idx="minor">
+            <a:schemeClr val="tx1"/>
+          </a:fontRef>
+        </p:style>
+      </p:cxnSp>
+      <p:cxnSp>
+        <p:nvCxnSpPr>
+          <p:cNvPr id="13" name="Straight Arrow Connector 12">
+            <a:extLst>
+              <a:ext uri="{FF2B5EF4-FFF2-40B4-BE49-F238E27FC236}">
+                <a16:creationId xmlns:a16="http://schemas.microsoft.com/office/drawing/2014/main" id="{7CD623CA-9CB5-A133-DB12-0F68301FCB5D}"/>
+              </a:ext>
+            </a:extLst>
+          </p:cNvPr>
+          <p:cNvCxnSpPr/>
+          <p:nvPr/>
+        </p:nvCxnSpPr>
+        <p:spPr>
+          <a:xfrm>
+            <a:off x="3742267" y="3894667"/>
+            <a:ext cx="2065866" cy="101600"/>
+          </a:xfrm>
+          <a:prstGeom prst="straightConnector1">
+            <a:avLst/>
+          </a:prstGeom>
+          <a:ln>
+            <a:tailEnd type="triangle"/>
+          </a:ln>
+        </p:spPr>
+        <p:style>
+          <a:lnRef idx="2">
+            <a:schemeClr val="accent1"/>
+          </a:lnRef>
+          <a:fillRef idx="0">
+            <a:schemeClr val="accent1"/>
+          </a:fillRef>
+          <a:effectRef idx="1">
+            <a:schemeClr val="accent1"/>
+          </a:effectRef>
+          <a:fontRef idx="minor">
+            <a:schemeClr val="tx1"/>
+          </a:fontRef>
+        </p:style>
+      </p:cxnSp>
+    </p:spTree>
+    <p:extLst>
+      <p:ext uri="{BB962C8B-B14F-4D97-AF65-F5344CB8AC3E}">
+        <p14:creationId xmlns:p14="http://schemas.microsoft.com/office/powerpoint/2010/main" val="4147411865"/>
+      </p:ext>
+    </p:extLst>
+  </p:cSld>
+  <p:clrMapOvr>
+    <a:masterClrMapping/>
+  </p:clrMapOvr>
+</p:sld>
+</file>
+
+<file path=ppt/slides/slide62.xml><?xml version="1.0" encoding="utf-8"?>
+<p:sld xmlns:a="http://schemas.openxmlformats.org/drawingml/2006/main" xmlns:r="http://schemas.openxmlformats.org/officeDocument/2006/relationships" xmlns:p="http://schemas.openxmlformats.org/presentationml/2006/main">
+  <p:cSld>
+    <p:spTree>
+      <p:nvGrpSpPr>
+        <p:cNvPr id="1" name=""/>
+        <p:cNvGrpSpPr/>
+        <p:nvPr/>
+      </p:nvGrpSpPr>
+      <p:grpSpPr>
+        <a:xfrm>
+          <a:off x="0" y="0"/>
+          <a:ext cx="0" cy="0"/>
+          <a:chOff x="0" y="0"/>
+          <a:chExt cx="0" cy="0"/>
+        </a:xfrm>
+      </p:grpSpPr>
+      <p:sp>
+        <p:nvSpPr>
+          <p:cNvPr id="2" name="Rectangle 1">
+            <a:extLst>
+              <a:ext uri="{FF2B5EF4-FFF2-40B4-BE49-F238E27FC236}">
+                <a16:creationId xmlns:a16="http://schemas.microsoft.com/office/drawing/2014/main" id="{4D12A604-72ED-F3C1-D0A5-0119609156AA}"/>
+              </a:ext>
+            </a:extLst>
+          </p:cNvPr>
+          <p:cNvSpPr/>
+          <p:nvPr/>
+        </p:nvSpPr>
+        <p:spPr>
+          <a:xfrm>
+            <a:off x="4284133" y="152400"/>
+            <a:ext cx="7721600" cy="6646333"/>
+          </a:xfrm>
+          <a:prstGeom prst="rect">
+            <a:avLst/>
+          </a:prstGeom>
+        </p:spPr>
+        <p:style>
+          <a:lnRef idx="2">
+            <a:schemeClr val="accent6"/>
+          </a:lnRef>
+          <a:fillRef idx="1">
+            <a:schemeClr val="lt1"/>
+          </a:fillRef>
+          <a:effectRef idx="0">
+            <a:schemeClr val="accent6"/>
+          </a:effectRef>
+          <a:fontRef idx="minor">
+            <a:schemeClr val="dk1"/>
+          </a:fontRef>
+        </p:style>
+        <p:txBody>
+          <a:bodyPr rtlCol="0" anchor="ctr"/>
+          <a:lstStyle/>
+          <a:p>
+            <a:pPr algn="ctr"/>
+            <a:r>
+              <a:rPr lang="en-US" dirty="0"/>
+              <a:t>Git branch master la </a:t>
+            </a:r>
+            <a:r>
+              <a:rPr lang="en-US" dirty="0" err="1"/>
+              <a:t>irundhu</a:t>
+            </a:r>
+            <a:r>
+              <a:rPr lang="en-US" dirty="0"/>
+              <a:t> main ah </a:t>
+            </a:r>
+            <a:r>
+              <a:rPr lang="en-US" dirty="0" err="1"/>
+              <a:t>maathi</a:t>
+            </a:r>
+            <a:r>
+              <a:rPr lang="en-US" dirty="0"/>
+              <a:t> </a:t>
+            </a:r>
+            <a:r>
+              <a:rPr lang="en-US" dirty="0" err="1"/>
+              <a:t>apparam</a:t>
+            </a:r>
+            <a:r>
+              <a:rPr lang="en-US" dirty="0"/>
+              <a:t> </a:t>
+            </a:r>
+            <a:r>
+              <a:rPr lang="en-US" dirty="0" err="1"/>
+              <a:t>namma</a:t>
+            </a:r>
+            <a:r>
+              <a:rPr lang="en-US" dirty="0"/>
+              <a:t> </a:t>
+            </a:r>
+            <a:r>
+              <a:rPr lang="en-US" dirty="0" err="1"/>
+              <a:t>kita</a:t>
+            </a:r>
+            <a:r>
+              <a:rPr lang="en-US" dirty="0"/>
+              <a:t> </a:t>
+            </a:r>
+            <a:r>
+              <a:rPr lang="en-US" dirty="0" err="1"/>
+              <a:t>irukira</a:t>
+            </a:r>
+            <a:r>
+              <a:rPr lang="en-US" dirty="0"/>
+              <a:t> code push panna global repositories la poi serum </a:t>
+            </a:r>
+            <a:r>
+              <a:rPr lang="en-US" dirty="0" err="1"/>
+              <a:t>apparam</a:t>
+            </a:r>
+            <a:r>
+              <a:rPr lang="en-US" dirty="0"/>
+              <a:t> refresh panna </a:t>
+            </a:r>
+            <a:r>
+              <a:rPr lang="en-US" dirty="0" err="1"/>
+              <a:t>namma</a:t>
+            </a:r>
+            <a:r>
+              <a:rPr lang="en-US" dirty="0"/>
+              <a:t> code </a:t>
+            </a:r>
+            <a:r>
+              <a:rPr lang="en-US" dirty="0" err="1"/>
+              <a:t>anga</a:t>
+            </a:r>
+            <a:r>
+              <a:rPr lang="en-US" dirty="0"/>
+              <a:t> </a:t>
+            </a:r>
+            <a:r>
+              <a:rPr lang="en-US" dirty="0" err="1"/>
+              <a:t>irukhum</a:t>
+            </a:r>
+            <a:r>
+              <a:rPr lang="en-US" dirty="0"/>
+              <a:t> </a:t>
+            </a:r>
+            <a:br>
+              <a:rPr lang="en-US" dirty="0"/>
+            </a:br>
+            <a:br>
+              <a:rPr lang="en-US" dirty="0"/>
+            </a:br>
+            <a:r>
+              <a:rPr lang="en-US" dirty="0" err="1"/>
+              <a:t>Idhu</a:t>
+            </a:r>
+            <a:r>
+              <a:rPr lang="en-US" dirty="0"/>
+              <a:t> GitHub-la </a:t>
+            </a:r>
+            <a:r>
+              <a:rPr lang="en-US" dirty="0" err="1"/>
+              <a:t>irukkura</a:t>
+            </a:r>
+            <a:r>
+              <a:rPr lang="en-US" dirty="0"/>
+              <a:t> latest branch information-ai local Git-</a:t>
+            </a:r>
+            <a:r>
+              <a:rPr lang="en-US" dirty="0" err="1"/>
+              <a:t>ku</a:t>
+            </a:r>
+            <a:r>
+              <a:rPr lang="en-US" dirty="0"/>
+              <a:t> update </a:t>
+            </a:r>
+            <a:r>
+              <a:rPr lang="en-US" dirty="0" err="1"/>
+              <a:t>pannum</a:t>
+            </a:r>
+            <a:r>
+              <a:rPr lang="en-US" dirty="0"/>
+              <a:t>. Un working files-ai merge </a:t>
+            </a:r>
+            <a:r>
+              <a:rPr lang="en-US" dirty="0" err="1"/>
+              <a:t>pannaadhu</a:t>
+            </a:r>
+            <a:br>
+              <a:rPr lang="en-US" dirty="0"/>
+            </a:br>
+            <a:br>
+              <a:rPr lang="en-US" dirty="0"/>
+            </a:br>
+            <a:r>
+              <a:rPr lang="en-US" dirty="0"/>
+              <a:t>* main</a:t>
+            </a:r>
+          </a:p>
+          <a:p>
+            <a:pPr lvl="0"/>
+            <a:r>
+              <a:rPr lang="en-US" dirty="0"/>
+              <a:t>  remotes/origin/</a:t>
+            </a:r>
+            <a:r>
+              <a:rPr lang="en-US" dirty="0" err="1"/>
+              <a:t>mainmain</a:t>
+            </a:r>
+            <a:r>
+              <a:rPr lang="en-US" dirty="0"/>
+              <a:t> → un local branch.</a:t>
+            </a:r>
+          </a:p>
+          <a:p>
+            <a:pPr lvl="0"/>
+            <a:r>
+              <a:rPr lang="en-US" dirty="0"/>
+              <a:t>remotes/origin/main → GitHub remote branch-ai local-la represent </a:t>
+            </a:r>
+            <a:r>
+              <a:rPr lang="en-US" dirty="0" err="1"/>
+              <a:t>pannura</a:t>
+            </a:r>
+            <a:r>
+              <a:rPr lang="en-US" dirty="0"/>
+              <a:t> reference.</a:t>
+            </a:r>
+            <a:br>
+              <a:rPr lang="en-US" dirty="0"/>
+            </a:br>
+            <a:br>
+              <a:rPr lang="en-US" dirty="0"/>
+            </a:br>
+            <a:r>
+              <a:rPr lang="en-US" dirty="0"/>
+              <a:t>## main...origin/main</a:t>
+            </a:r>
+          </a:p>
+          <a:p>
+            <a:r>
+              <a:rPr lang="en-US" dirty="0"/>
+              <a:t> M "Playwright &amp; </a:t>
+            </a:r>
+            <a:r>
+              <a:rPr lang="en-US" dirty="0" err="1"/>
+              <a:t>API.pptx“Idhu</a:t>
+            </a:r>
+            <a:r>
+              <a:rPr lang="en-US" dirty="0"/>
+              <a:t> local branch-um remote-tracking branch-um same position-la </a:t>
+            </a:r>
+            <a:r>
+              <a:rPr lang="en-US" dirty="0" err="1"/>
+              <a:t>irukku</a:t>
+            </a:r>
+            <a:r>
+              <a:rPr lang="en-US" dirty="0"/>
+              <a:t>-nu indicate </a:t>
+            </a:r>
+            <a:r>
+              <a:rPr lang="en-US" dirty="0" err="1"/>
+              <a:t>pannalaam</a:t>
+            </a:r>
+            <a:r>
+              <a:rPr lang="en-US" dirty="0"/>
+              <a:t>.</a:t>
+            </a:r>
+          </a:p>
+          <a:p>
+            <a:pPr lvl="0"/>
+            <a:r>
+              <a:rPr lang="en-US" dirty="0"/>
+              <a:t>Local main-la </a:t>
+            </a:r>
+            <a:r>
+              <a:rPr lang="en-US" dirty="0" err="1"/>
+              <a:t>illaadha</a:t>
+            </a:r>
+            <a:r>
+              <a:rPr lang="en-US" dirty="0"/>
+              <a:t> remote commits </a:t>
+            </a:r>
+            <a:r>
+              <a:rPr lang="en-US" dirty="0" err="1"/>
+              <a:t>irukka</a:t>
+            </a:r>
+            <a:r>
+              <a:rPr lang="en-US" dirty="0"/>
+              <a:t>-nu </a:t>
+            </a:r>
+            <a:r>
+              <a:rPr lang="en-US" dirty="0" err="1"/>
+              <a:t>paakka</a:t>
+            </a:r>
+            <a:r>
+              <a:rPr lang="en-US" dirty="0"/>
+              <a:t>:</a:t>
+            </a:r>
+            <a:br>
+              <a:rPr lang="en-US" dirty="0"/>
+            </a:br>
+            <a:br>
+              <a:rPr lang="en-US" dirty="0"/>
+            </a:br>
+            <a:r>
+              <a:rPr lang="en-US" dirty="0"/>
+              <a:t>Output-la commits </a:t>
+            </a:r>
+            <a:r>
+              <a:rPr lang="en-US" dirty="0" err="1"/>
+              <a:t>vandha</a:t>
+            </a:r>
+            <a:r>
+              <a:rPr lang="en-US" dirty="0"/>
+              <a:t>, </a:t>
+            </a:r>
+            <a:r>
+              <a:rPr lang="en-US" dirty="0" err="1"/>
+              <a:t>avai</a:t>
+            </a:r>
+            <a:r>
+              <a:rPr lang="en-US" dirty="0"/>
+              <a:t> remote branch-la </a:t>
+            </a:r>
+            <a:r>
+              <a:rPr lang="en-US" dirty="0" err="1"/>
+              <a:t>irukku</a:t>
+            </a:r>
+            <a:r>
+              <a:rPr lang="en-US" dirty="0"/>
+              <a:t>; local main-la </a:t>
+            </a:r>
+            <a:r>
+              <a:rPr lang="en-US" dirty="0" err="1"/>
+              <a:t>innum</a:t>
+            </a:r>
+            <a:r>
+              <a:rPr lang="en-US" dirty="0"/>
+              <a:t> </a:t>
+            </a:r>
+            <a:r>
+              <a:rPr lang="en-US" dirty="0" err="1"/>
+              <a:t>illai</a:t>
+            </a:r>
+            <a:r>
+              <a:rPr lang="en-US" dirty="0"/>
+              <a:t>.</a:t>
+            </a:r>
+          </a:p>
+          <a:p>
+            <a:pPr lvl="0"/>
+            <a:r>
+              <a:rPr lang="en-US" dirty="0"/>
+              <a:t>Output empty-ah </a:t>
+            </a:r>
+            <a:r>
+              <a:rPr lang="en-US" dirty="0" err="1"/>
+              <a:t>irundha</a:t>
+            </a:r>
+            <a:r>
+              <a:rPr lang="en-US" dirty="0"/>
+              <a:t>, remote main-la local main-ai </a:t>
+            </a:r>
+            <a:r>
+              <a:rPr lang="en-US" dirty="0" err="1"/>
+              <a:t>vida</a:t>
+            </a:r>
+            <a:r>
+              <a:rPr lang="en-US" dirty="0"/>
+              <a:t> </a:t>
+            </a:r>
+            <a:r>
+              <a:rPr lang="en-US" dirty="0" err="1"/>
+              <a:t>pudhu</a:t>
+            </a:r>
+            <a:r>
+              <a:rPr lang="en-US" dirty="0"/>
+              <a:t> commits </a:t>
+            </a:r>
+            <a:r>
+              <a:rPr lang="en-US" dirty="0" err="1"/>
+              <a:t>illai</a:t>
+            </a:r>
+            <a:r>
+              <a:rPr lang="en-US" dirty="0"/>
+              <a:t>.</a:t>
+            </a:r>
+          </a:p>
+          <a:p>
+            <a:endParaRPr lang="en-US" dirty="0"/>
+          </a:p>
+          <a:p>
+            <a:pPr lvl="0"/>
+            <a:endParaRPr lang="en-US" dirty="0"/>
+          </a:p>
+          <a:p>
+            <a:pPr algn="ctr"/>
+            <a:endParaRPr lang="en-US" dirty="0"/>
+          </a:p>
+        </p:txBody>
+      </p:sp>
+      <p:sp>
+        <p:nvSpPr>
+          <p:cNvPr id="4" name="Rectangle 3">
+            <a:extLst>
+              <a:ext uri="{FF2B5EF4-FFF2-40B4-BE49-F238E27FC236}">
+                <a16:creationId xmlns:a16="http://schemas.microsoft.com/office/drawing/2014/main" id="{41901E26-5FF9-7371-8F57-F3A3CD1D76D9}"/>
+              </a:ext>
+            </a:extLst>
+          </p:cNvPr>
+          <p:cNvSpPr/>
+          <p:nvPr/>
+        </p:nvSpPr>
+        <p:spPr>
+          <a:xfrm>
+            <a:off x="575734" y="152401"/>
+            <a:ext cx="3318933" cy="5825066"/>
+          </a:xfrm>
+          <a:prstGeom prst="rect">
+            <a:avLst/>
+          </a:prstGeom>
+        </p:spPr>
+        <p:style>
+          <a:lnRef idx="2">
+            <a:schemeClr val="accent6"/>
+          </a:lnRef>
+          <a:fillRef idx="1">
+            <a:schemeClr val="lt1"/>
+          </a:fillRef>
+          <a:effectRef idx="0">
+            <a:schemeClr val="accent6"/>
+          </a:effectRef>
+          <a:fontRef idx="minor">
+            <a:schemeClr val="dk1"/>
+          </a:fontRef>
+        </p:style>
+        <p:txBody>
+          <a:bodyPr rtlCol="0" anchor="ctr"/>
+          <a:lstStyle/>
+          <a:p>
+            <a:pPr algn="ctr"/>
+            <a:r>
+              <a:rPr lang="en-US" dirty="0"/>
+              <a:t>git branch -M main</a:t>
+            </a:r>
+          </a:p>
+          <a:p>
+            <a:pPr algn="ctr"/>
+            <a:r>
+              <a:rPr lang="en-US" dirty="0"/>
+              <a:t>git push -u origin main</a:t>
+            </a:r>
+            <a:br>
+              <a:rPr lang="en-US" dirty="0"/>
+            </a:br>
+            <a:br>
+              <a:rPr lang="en-US" dirty="0"/>
+            </a:br>
+            <a:r>
+              <a:rPr lang="en-US" dirty="0"/>
+              <a:t>git fetch origin</a:t>
+            </a:r>
+            <a:br>
+              <a:rPr lang="en-US" dirty="0"/>
+            </a:br>
+            <a:br>
+              <a:rPr lang="en-US" dirty="0"/>
+            </a:br>
+            <a:r>
+              <a:rPr lang="en-US" dirty="0"/>
+              <a:t>git branch –a</a:t>
+            </a:r>
+            <a:br>
+              <a:rPr lang="en-US" dirty="0"/>
+            </a:br>
+            <a:br>
+              <a:rPr lang="en-US" dirty="0"/>
+            </a:br>
+            <a:r>
+              <a:rPr lang="en-US" dirty="0"/>
+              <a:t>git status –sb</a:t>
+            </a:r>
+            <a:br>
+              <a:rPr lang="en-US" dirty="0"/>
+            </a:br>
+            <a:br>
+              <a:rPr lang="en-US" dirty="0"/>
+            </a:br>
+            <a:r>
+              <a:rPr lang="en-US" dirty="0"/>
+              <a:t>git log --</a:t>
+            </a:r>
+            <a:r>
+              <a:rPr lang="en-US" dirty="0" err="1"/>
+              <a:t>oneline</a:t>
+            </a:r>
+            <a:r>
+              <a:rPr lang="en-US" dirty="0"/>
+              <a:t> </a:t>
+            </a:r>
+            <a:r>
+              <a:rPr lang="en-US" dirty="0" err="1"/>
+              <a:t>main..origin</a:t>
+            </a:r>
+            <a:r>
+              <a:rPr lang="en-US" dirty="0"/>
+              <a:t>/main</a:t>
+            </a:r>
+            <a:br>
+              <a:rPr lang="en-US" dirty="0"/>
+            </a:br>
+            <a:br>
+              <a:rPr lang="en-US" dirty="0"/>
+            </a:br>
+            <a:endParaRPr lang="en-US" dirty="0"/>
+          </a:p>
+          <a:p>
+            <a:pPr algn="ctr"/>
+            <a:endParaRPr lang="en-US" dirty="0"/>
+          </a:p>
+        </p:txBody>
+      </p:sp>
+      <p:cxnSp>
+        <p:nvCxnSpPr>
+          <p:cNvPr id="6" name="Straight Arrow Connector 5">
+            <a:extLst>
+              <a:ext uri="{FF2B5EF4-FFF2-40B4-BE49-F238E27FC236}">
+                <a16:creationId xmlns:a16="http://schemas.microsoft.com/office/drawing/2014/main" id="{CC6047EC-4CDA-F3F7-6C5C-A396CAB93B62}"/>
+              </a:ext>
+            </a:extLst>
+          </p:cNvPr>
+          <p:cNvCxnSpPr/>
+          <p:nvPr/>
+        </p:nvCxnSpPr>
+        <p:spPr>
+          <a:xfrm flipV="1">
+            <a:off x="3259667" y="618067"/>
+            <a:ext cx="1168400" cy="651933"/>
+          </a:xfrm>
+          <a:prstGeom prst="straightConnector1">
+            <a:avLst/>
+          </a:prstGeom>
+          <a:ln>
+            <a:tailEnd type="triangle"/>
+          </a:ln>
+        </p:spPr>
+        <p:style>
+          <a:lnRef idx="2">
+            <a:schemeClr val="accent1"/>
+          </a:lnRef>
+          <a:fillRef idx="0">
+            <a:schemeClr val="accent1"/>
+          </a:fillRef>
+          <a:effectRef idx="1">
+            <a:schemeClr val="accent1"/>
+          </a:effectRef>
+          <a:fontRef idx="minor">
+            <a:schemeClr val="tx1"/>
+          </a:fontRef>
+        </p:style>
+      </p:cxnSp>
+      <p:cxnSp>
+        <p:nvCxnSpPr>
+          <p:cNvPr id="7" name="Straight Arrow Connector 6">
+            <a:extLst>
+              <a:ext uri="{FF2B5EF4-FFF2-40B4-BE49-F238E27FC236}">
+                <a16:creationId xmlns:a16="http://schemas.microsoft.com/office/drawing/2014/main" id="{E773E1D7-D9D1-3046-F5BF-031477599371}"/>
+              </a:ext>
+            </a:extLst>
+          </p:cNvPr>
+          <p:cNvCxnSpPr>
+            <a:cxnSpLocks/>
+          </p:cNvCxnSpPr>
+          <p:nvPr/>
+        </p:nvCxnSpPr>
+        <p:spPr>
+          <a:xfrm flipV="1">
+            <a:off x="3115733" y="1473200"/>
+            <a:ext cx="1413934" cy="651932"/>
+          </a:xfrm>
+          <a:prstGeom prst="straightConnector1">
+            <a:avLst/>
+          </a:prstGeom>
+          <a:ln>
+            <a:tailEnd type="triangle"/>
+          </a:ln>
+        </p:spPr>
+        <p:style>
+          <a:lnRef idx="2">
+            <a:schemeClr val="accent1"/>
+          </a:lnRef>
+          <a:fillRef idx="0">
+            <a:schemeClr val="accent1"/>
+          </a:fillRef>
+          <a:effectRef idx="1">
+            <a:schemeClr val="accent1"/>
+          </a:effectRef>
+          <a:fontRef idx="minor">
+            <a:schemeClr val="tx1"/>
+          </a:fontRef>
+        </p:style>
+      </p:cxnSp>
+      <p:cxnSp>
+        <p:nvCxnSpPr>
+          <p:cNvPr id="10" name="Straight Arrow Connector 9">
+            <a:extLst>
+              <a:ext uri="{FF2B5EF4-FFF2-40B4-BE49-F238E27FC236}">
+                <a16:creationId xmlns:a16="http://schemas.microsoft.com/office/drawing/2014/main" id="{AEA5D7C6-2C07-B9F4-9148-4ABF3AE7861A}"/>
+              </a:ext>
+            </a:extLst>
+          </p:cNvPr>
+          <p:cNvCxnSpPr/>
+          <p:nvPr/>
+        </p:nvCxnSpPr>
+        <p:spPr>
+          <a:xfrm flipV="1">
+            <a:off x="3073400" y="2573867"/>
+            <a:ext cx="1354667" cy="76200"/>
+          </a:xfrm>
+          <a:prstGeom prst="straightConnector1">
+            <a:avLst/>
+          </a:prstGeom>
+          <a:ln>
+            <a:tailEnd type="triangle"/>
+          </a:ln>
+        </p:spPr>
+        <p:style>
+          <a:lnRef idx="2">
+            <a:schemeClr val="accent1"/>
+          </a:lnRef>
+          <a:fillRef idx="0">
+            <a:schemeClr val="accent1"/>
+          </a:fillRef>
+          <a:effectRef idx="1">
+            <a:schemeClr val="accent1"/>
+          </a:effectRef>
+          <a:fontRef idx="minor">
+            <a:schemeClr val="tx1"/>
+          </a:fontRef>
+        </p:style>
+      </p:cxnSp>
+      <p:cxnSp>
+        <p:nvCxnSpPr>
+          <p:cNvPr id="12" name="Straight Arrow Connector 11">
+            <a:extLst>
+              <a:ext uri="{FF2B5EF4-FFF2-40B4-BE49-F238E27FC236}">
+                <a16:creationId xmlns:a16="http://schemas.microsoft.com/office/drawing/2014/main" id="{0B53CCE5-13CD-795C-ECE1-3E5DBA35FBF2}"/>
+              </a:ext>
+            </a:extLst>
+          </p:cNvPr>
+          <p:cNvCxnSpPr/>
+          <p:nvPr/>
+        </p:nvCxnSpPr>
+        <p:spPr>
+          <a:xfrm>
+            <a:off x="3039533" y="3259667"/>
+            <a:ext cx="1388534" cy="372533"/>
+          </a:xfrm>
+          <a:prstGeom prst="straightConnector1">
+            <a:avLst/>
+          </a:prstGeom>
+          <a:ln>
+            <a:tailEnd type="triangle"/>
+          </a:ln>
+        </p:spPr>
+        <p:style>
+          <a:lnRef idx="2">
+            <a:schemeClr val="accent1"/>
+          </a:lnRef>
+          <a:fillRef idx="0">
+            <a:schemeClr val="accent1"/>
+          </a:fillRef>
+          <a:effectRef idx="1">
+            <a:schemeClr val="accent1"/>
+          </a:effectRef>
+          <a:fontRef idx="minor">
+            <a:schemeClr val="tx1"/>
+          </a:fontRef>
+        </p:style>
+      </p:cxnSp>
+      <p:cxnSp>
+        <p:nvCxnSpPr>
+          <p:cNvPr id="14" name="Straight Arrow Connector 13">
+            <a:extLst>
+              <a:ext uri="{FF2B5EF4-FFF2-40B4-BE49-F238E27FC236}">
+                <a16:creationId xmlns:a16="http://schemas.microsoft.com/office/drawing/2014/main" id="{E3631377-D336-A621-E950-3510259DD6E6}"/>
+              </a:ext>
+            </a:extLst>
+          </p:cNvPr>
+          <p:cNvCxnSpPr/>
+          <p:nvPr/>
+        </p:nvCxnSpPr>
+        <p:spPr>
+          <a:xfrm>
+            <a:off x="3344333" y="4047067"/>
+            <a:ext cx="1185334" cy="787400"/>
+          </a:xfrm>
+          <a:prstGeom prst="straightConnector1">
+            <a:avLst/>
+          </a:prstGeom>
+          <a:ln>
+            <a:tailEnd type="triangle"/>
+          </a:ln>
+        </p:spPr>
+        <p:style>
+          <a:lnRef idx="2">
+            <a:schemeClr val="accent1"/>
+          </a:lnRef>
+          <a:fillRef idx="0">
+            <a:schemeClr val="accent1"/>
+          </a:fillRef>
+          <a:effectRef idx="1">
+            <a:schemeClr val="accent1"/>
+          </a:effectRef>
+          <a:fontRef idx="minor">
+            <a:schemeClr val="tx1"/>
+          </a:fontRef>
+        </p:style>
+      </p:cxnSp>
+    </p:spTree>
+    <p:extLst>
+      <p:ext uri="{BB962C8B-B14F-4D97-AF65-F5344CB8AC3E}">
+        <p14:creationId xmlns:p14="http://schemas.microsoft.com/office/powerpoint/2010/main" val="252520861"/>
+      </p:ext>
+    </p:extLst>
+  </p:cSld>
+  <p:clrMapOvr>
+    <a:masterClrMapping/>
+  </p:clrMapOvr>
+</p:sld>
+</file>
+
+<file path=ppt/slides/slide63.xml><?xml version="1.0" encoding="utf-8"?>
+<p:sld xmlns:a="http://schemas.openxmlformats.org/drawingml/2006/main" xmlns:r="http://schemas.openxmlformats.org/officeDocument/2006/relationships" xmlns:p="http://schemas.openxmlformats.org/presentationml/2006/main">
+  <p:cSld>
+    <p:spTree>
+      <p:nvGrpSpPr>
+        <p:cNvPr id="1" name=""/>
+        <p:cNvGrpSpPr/>
+        <p:nvPr/>
+      </p:nvGrpSpPr>
+      <p:grpSpPr>
+        <a:xfrm>
+          <a:off x="0" y="0"/>
+          <a:ext cx="0" cy="0"/>
+          <a:chOff x="0" y="0"/>
+          <a:chExt cx="0" cy="0"/>
+        </a:xfrm>
+      </p:grpSpPr>
+      <p:sp>
+        <p:nvSpPr>
+          <p:cNvPr id="2" name="Rectangle 1">
+            <a:extLst>
+              <a:ext uri="{FF2B5EF4-FFF2-40B4-BE49-F238E27FC236}">
+                <a16:creationId xmlns:a16="http://schemas.microsoft.com/office/drawing/2014/main" id="{C1585664-8AB7-805E-85D5-390FAE6DD8B8}"/>
+              </a:ext>
+            </a:extLst>
+          </p:cNvPr>
+          <p:cNvSpPr/>
+          <p:nvPr/>
+        </p:nvSpPr>
+        <p:spPr>
+          <a:xfrm>
+            <a:off x="118533" y="127000"/>
+            <a:ext cx="4546600" cy="6256867"/>
+          </a:xfrm>
+          <a:prstGeom prst="rect">
+            <a:avLst/>
+          </a:prstGeom>
+        </p:spPr>
+        <p:style>
+          <a:lnRef idx="2">
+            <a:schemeClr val="accent6"/>
+          </a:lnRef>
+          <a:fillRef idx="1">
+            <a:schemeClr val="lt1"/>
+          </a:fillRef>
+          <a:effectRef idx="0">
+            <a:schemeClr val="accent6"/>
+          </a:effectRef>
+          <a:fontRef idx="minor">
+            <a:schemeClr val="dk1"/>
+          </a:fontRef>
+        </p:style>
+        <p:txBody>
+          <a:bodyPr rtlCol="0" anchor="ctr"/>
+          <a:lstStyle/>
+          <a:p>
+            <a:r>
+              <a:rPr lang="en-US" dirty="0"/>
+              <a:t>git log --</a:t>
+            </a:r>
+            <a:r>
+              <a:rPr lang="en-US" dirty="0" err="1"/>
+              <a:t>oneline</a:t>
+            </a:r>
+            <a:r>
+              <a:rPr lang="en-US" dirty="0"/>
+              <a:t> </a:t>
+            </a:r>
+          </a:p>
+          <a:p>
+            <a:endParaRPr lang="en-US" dirty="0"/>
+          </a:p>
+          <a:p>
+            <a:r>
+              <a:rPr lang="en-US" dirty="0" err="1"/>
+              <a:t>Ippa</a:t>
+            </a:r>
+            <a:r>
+              <a:rPr lang="en-US" dirty="0"/>
+              <a:t> </a:t>
+            </a:r>
+            <a:r>
+              <a:rPr lang="en-US" dirty="0" err="1"/>
+              <a:t>na</a:t>
+            </a:r>
+            <a:r>
+              <a:rPr lang="en-US" dirty="0"/>
+              <a:t> </a:t>
+            </a:r>
+            <a:r>
+              <a:rPr lang="en-US" dirty="0" err="1"/>
+              <a:t>oru</a:t>
+            </a:r>
+            <a:r>
+              <a:rPr lang="en-US" dirty="0"/>
+              <a:t> read me file project la create </a:t>
+            </a:r>
+            <a:r>
+              <a:rPr lang="en-US" dirty="0" err="1"/>
+              <a:t>panniruka</a:t>
+            </a:r>
+            <a:r>
+              <a:rPr lang="en-US" dirty="0"/>
+              <a:t> and status check panna porn it will show untracked file</a:t>
+            </a:r>
+            <a:br>
+              <a:rPr lang="en-US" dirty="0"/>
+            </a:br>
+            <a:br>
+              <a:rPr lang="en-US" dirty="0"/>
+            </a:br>
+            <a:r>
+              <a:rPr lang="en-US" dirty="0"/>
+              <a:t>git add README.md, git status, git commit -m "docs: update project README“, git push origin main</a:t>
+            </a:r>
+          </a:p>
+          <a:p>
+            <a:endParaRPr lang="en-US" dirty="0"/>
+          </a:p>
+          <a:p>
+            <a:endParaRPr lang="en-US" dirty="0"/>
+          </a:p>
+          <a:p>
+            <a:endParaRPr lang="en-US" dirty="0"/>
+          </a:p>
+          <a:p>
+            <a:endParaRPr lang="en-US" dirty="0"/>
+          </a:p>
+          <a:p>
+            <a:endParaRPr lang="en-US" dirty="0"/>
+          </a:p>
+          <a:p>
+            <a:endParaRPr lang="en-US" dirty="0"/>
+          </a:p>
+          <a:p>
+            <a:endParaRPr lang="en-US" dirty="0"/>
+          </a:p>
+          <a:p>
+            <a:endParaRPr lang="en-US" dirty="0"/>
+          </a:p>
+          <a:p>
+            <a:endParaRPr lang="en-US" dirty="0"/>
+          </a:p>
+        </p:txBody>
+      </p:sp>
+      <p:sp>
+        <p:nvSpPr>
+          <p:cNvPr id="3" name="Rectangle 2">
+            <a:extLst>
+              <a:ext uri="{FF2B5EF4-FFF2-40B4-BE49-F238E27FC236}">
+                <a16:creationId xmlns:a16="http://schemas.microsoft.com/office/drawing/2014/main" id="{F5D424FE-8A2C-B00D-3A7F-7D92A107C998}"/>
+              </a:ext>
+            </a:extLst>
+          </p:cNvPr>
+          <p:cNvSpPr/>
+          <p:nvPr/>
+        </p:nvSpPr>
+        <p:spPr>
+          <a:xfrm>
+            <a:off x="4919133" y="169333"/>
+            <a:ext cx="7061200" cy="6138334"/>
+          </a:xfrm>
+          <a:prstGeom prst="rect">
+            <a:avLst/>
+          </a:prstGeom>
+        </p:spPr>
+        <p:style>
+          <a:lnRef idx="2">
+            <a:schemeClr val="accent6"/>
+          </a:lnRef>
+          <a:fillRef idx="1">
+            <a:schemeClr val="lt1"/>
+          </a:fillRef>
+          <a:effectRef idx="0">
+            <a:schemeClr val="accent6"/>
+          </a:effectRef>
+          <a:fontRef idx="minor">
+            <a:schemeClr val="dk1"/>
+          </a:fontRef>
+        </p:style>
+        <p:txBody>
+          <a:bodyPr rtlCol="0" anchor="ctr"/>
+          <a:lstStyle/>
+          <a:p>
+            <a:pPr algn="ctr"/>
+            <a:r>
+              <a:rPr lang="en-US" dirty="0"/>
+              <a:t>git log --</a:t>
+            </a:r>
+            <a:r>
+              <a:rPr lang="en-US" dirty="0" err="1"/>
+              <a:t>oneline</a:t>
+            </a:r>
+            <a:r>
+              <a:rPr lang="en-US" dirty="0"/>
+              <a:t> </a:t>
+            </a:r>
+            <a:r>
+              <a:rPr lang="en-US" dirty="0" err="1"/>
+              <a:t>kudutha</a:t>
+            </a:r>
+            <a:r>
+              <a:rPr lang="en-US" dirty="0"/>
+              <a:t>, un Git repository-la </a:t>
+            </a:r>
+            <a:r>
+              <a:rPr lang="en-US" dirty="0" err="1"/>
+              <a:t>irukkura</a:t>
+            </a:r>
+            <a:r>
+              <a:rPr lang="en-US" dirty="0"/>
+              <a:t> commit history-ai short format-la </a:t>
+            </a:r>
+            <a:r>
+              <a:rPr lang="en-US" dirty="0" err="1"/>
+              <a:t>paarkkalaam</a:t>
+            </a:r>
+            <a:r>
+              <a:rPr lang="en-US" dirty="0"/>
+              <a:t>. cf6a381 (HEAD -&gt; main, origin/main, origin/HEAD) Initial commit</a:t>
+            </a:r>
+          </a:p>
+          <a:p>
+            <a:pPr algn="ctr"/>
+            <a:endParaRPr lang="en-US" dirty="0"/>
+          </a:p>
+          <a:p>
+            <a:pPr algn="ctr"/>
+            <a:endParaRPr lang="en-US" dirty="0"/>
+          </a:p>
+          <a:p>
+            <a:pPr algn="ctr"/>
+            <a:r>
+              <a:rPr lang="en-US" dirty="0"/>
+              <a:t>Untracked files:</a:t>
+            </a:r>
+          </a:p>
+          <a:p>
+            <a:pPr algn="ctr"/>
+            <a:r>
+              <a:rPr lang="en-US" dirty="0"/>
+              <a:t>  (use "git add &lt;file&gt;..." to include in what will be committed)</a:t>
+            </a:r>
+          </a:p>
+          <a:p>
+            <a:pPr algn="ctr"/>
+            <a:r>
+              <a:rPr lang="en-US" dirty="0"/>
+              <a:t>        readme.txt</a:t>
+            </a:r>
+          </a:p>
+          <a:p>
+            <a:pPr algn="ctr"/>
+            <a:endParaRPr lang="en-US" dirty="0"/>
+          </a:p>
+          <a:p>
+            <a:pPr algn="ctr"/>
+            <a:r>
+              <a:rPr lang="en-US" dirty="0"/>
+              <a:t>no changes added to commit (use "git add" and/or "git commit -a")</a:t>
+            </a:r>
+          </a:p>
+          <a:p>
+            <a:pPr algn="ctr"/>
+            <a:r>
+              <a:rPr lang="en-US" dirty="0"/>
+              <a:t>PS C:\Users\haris\OneDrive\Desktop\compplaywright</a:t>
+            </a:r>
+            <a:br>
+              <a:rPr lang="en-US" dirty="0"/>
+            </a:br>
+            <a:br>
+              <a:rPr lang="en-US" dirty="0"/>
+            </a:br>
+            <a:r>
+              <a:rPr lang="en-US" dirty="0"/>
+              <a:t>so </a:t>
+            </a:r>
+            <a:r>
+              <a:rPr lang="en-US" dirty="0" err="1"/>
+              <a:t>pudhu</a:t>
+            </a:r>
+            <a:r>
+              <a:rPr lang="en-US" dirty="0"/>
+              <a:t> file create panni add panni commit panni push </a:t>
+            </a:r>
+            <a:r>
+              <a:rPr lang="en-US" dirty="0" err="1"/>
+              <a:t>pandrom</a:t>
+            </a:r>
+            <a:endParaRPr lang="en-US" dirty="0"/>
+          </a:p>
+          <a:p>
+            <a:pPr algn="ctr"/>
+            <a:endParaRPr lang="en-US" dirty="0"/>
+          </a:p>
+          <a:p>
+            <a:pPr algn="ctr"/>
+            <a:endParaRPr lang="en-US" dirty="0"/>
+          </a:p>
+          <a:p>
+            <a:pPr algn="ctr"/>
+            <a:endParaRPr lang="en-US" dirty="0"/>
+          </a:p>
+          <a:p>
+            <a:pPr algn="ctr"/>
+            <a:endParaRPr lang="en-US" dirty="0"/>
+          </a:p>
+          <a:p>
+            <a:pPr algn="ctr"/>
+            <a:endParaRPr lang="en-US" dirty="0"/>
+          </a:p>
+          <a:p>
+            <a:pPr algn="ctr"/>
+            <a:endParaRPr lang="en-US" dirty="0"/>
+          </a:p>
+        </p:txBody>
+      </p:sp>
+      <p:graphicFrame>
+        <p:nvGraphicFramePr>
+          <p:cNvPr id="4" name="Table 3">
+            <a:extLst>
+              <a:ext uri="{FF2B5EF4-FFF2-40B4-BE49-F238E27FC236}">
+                <a16:creationId xmlns:a16="http://schemas.microsoft.com/office/drawing/2014/main" id="{04C91345-727C-F04C-BE6A-6DBD3A1AD73E}"/>
+              </a:ext>
+            </a:extLst>
+          </p:cNvPr>
+          <p:cNvGraphicFramePr>
+            <a:graphicFrameLocks noGrp="1"/>
+          </p:cNvGraphicFramePr>
+          <p:nvPr>
+            <p:extLst>
+              <p:ext uri="{D42A27DB-BD31-4B8C-83A1-F6EECF244321}">
+                <p14:modId xmlns:p14="http://schemas.microsoft.com/office/powerpoint/2010/main" val="1638703089"/>
+              </p:ext>
+            </p:extLst>
+          </p:nvPr>
+        </p:nvGraphicFramePr>
+        <p:xfrm>
+          <a:off x="668866" y="4353560"/>
+          <a:ext cx="10515600" cy="1737360"/>
+        </p:xfrm>
+        <a:graphic>
+          <a:graphicData uri="http://schemas.openxmlformats.org/drawingml/2006/table">
+            <a:tbl>
+              <a:tblPr>
+                <a:tableStyleId>{5C22544A-7EE6-4342-B048-85BDC9FD1C3A}</a:tableStyleId>
+              </a:tblPr>
+              <a:tblGrid>
+                <a:gridCol w="5257800">
+                  <a:extLst>
+                    <a:ext uri="{9D8B030D-6E8A-4147-A177-3AD203B41FA5}">
+                      <a16:colId xmlns:a16="http://schemas.microsoft.com/office/drawing/2014/main" val="761609127"/>
+                    </a:ext>
+                  </a:extLst>
+                </a:gridCol>
+                <a:gridCol w="5257800">
+                  <a:extLst>
+                    <a:ext uri="{9D8B030D-6E8A-4147-A177-3AD203B41FA5}">
+                      <a16:colId xmlns:a16="http://schemas.microsoft.com/office/drawing/2014/main" val="3208763549"/>
+                    </a:ext>
+                  </a:extLst>
+                </a:gridCol>
+              </a:tblGrid>
+              <a:tr h="0">
+                <a:tc>
+                  <a:txBody>
+                    <a:bodyPr/>
+                    <a:lstStyle/>
+                    <a:p>
+                      <a:pPr>
+                        <a:buNone/>
+                      </a:pPr>
+                      <a:r>
+                        <a:rPr lang="en-US"/>
+                        <a:t>Command</a:t>
+                      </a:r>
+                    </a:p>
+                  </a:txBody>
+                  <a:tcPr anchor="ctr"/>
+                </a:tc>
+                <a:tc>
+                  <a:txBody>
+                    <a:bodyPr/>
+                    <a:lstStyle/>
+                    <a:p>
+                      <a:pPr>
+                        <a:buNone/>
+                      </a:pPr>
+                      <a:r>
+                        <a:rPr lang="en-US"/>
+                        <a:t>Meaning</a:t>
+                      </a:r>
+                    </a:p>
+                  </a:txBody>
+                  <a:tcPr anchor="ctr"/>
+                </a:tc>
+                <a:extLst>
+                  <a:ext uri="{0D108BD9-81ED-4DB2-BD59-A6C34878D82A}">
+                    <a16:rowId xmlns:a16="http://schemas.microsoft.com/office/drawing/2014/main" val="1744299222"/>
+                  </a:ext>
+                </a:extLst>
+              </a:tr>
+              <a:tr h="0">
+                <a:tc>
+                  <a:txBody>
+                    <a:bodyPr/>
+                    <a:lstStyle/>
+                    <a:p>
+                      <a:pPr>
+                        <a:buNone/>
+                      </a:pPr>
+                      <a:r>
+                        <a:rPr lang="en-US"/>
+                        <a:t>git push</a:t>
+                      </a:r>
+                    </a:p>
+                  </a:txBody>
+                  <a:tcPr anchor="ctr"/>
+                </a:tc>
+                <a:tc>
+                  <a:txBody>
+                    <a:bodyPr/>
+                    <a:lstStyle/>
+                    <a:p>
+                      <a:pPr>
+                        <a:buNone/>
+                      </a:pPr>
+                      <a:r>
+                        <a:rPr lang="en-US"/>
+                        <a:t>Configured upstream branch-ku push pannum.</a:t>
+                      </a:r>
+                    </a:p>
+                  </a:txBody>
+                  <a:tcPr anchor="ctr"/>
+                </a:tc>
+                <a:extLst>
+                  <a:ext uri="{0D108BD9-81ED-4DB2-BD59-A6C34878D82A}">
+                    <a16:rowId xmlns:a16="http://schemas.microsoft.com/office/drawing/2014/main" val="1822441262"/>
+                  </a:ext>
+                </a:extLst>
+              </a:tr>
+              <a:tr h="0">
+                <a:tc>
+                  <a:txBody>
+                    <a:bodyPr/>
+                    <a:lstStyle/>
+                    <a:p>
+                      <a:pPr>
+                        <a:buNone/>
+                      </a:pPr>
+                      <a:r>
+                        <a:rPr lang="en-US"/>
+                        <a:t>git push origin main</a:t>
+                      </a:r>
+                    </a:p>
+                  </a:txBody>
+                  <a:tcPr anchor="ctr"/>
+                </a:tc>
+                <a:tc>
+                  <a:txBody>
+                    <a:bodyPr/>
+                    <a:lstStyle/>
+                    <a:p>
+                      <a:pPr>
+                        <a:buNone/>
+                      </a:pPr>
+                      <a:r>
+                        <a:rPr lang="en-US"/>
+                        <a:t>origin remote-oda main branch-ku explicit-ah push pannum.</a:t>
+                      </a:r>
+                    </a:p>
+                  </a:txBody>
+                  <a:tcPr anchor="ctr"/>
+                </a:tc>
+                <a:extLst>
+                  <a:ext uri="{0D108BD9-81ED-4DB2-BD59-A6C34878D82A}">
+                    <a16:rowId xmlns:a16="http://schemas.microsoft.com/office/drawing/2014/main" val="1013735225"/>
+                  </a:ext>
+                </a:extLst>
+              </a:tr>
+              <a:tr h="0">
+                <a:tc>
+                  <a:txBody>
+                    <a:bodyPr/>
+                    <a:lstStyle/>
+                    <a:p>
+                      <a:pPr>
+                        <a:buNone/>
+                      </a:pPr>
+                      <a:r>
+                        <a:rPr lang="en-US"/>
+                        <a:t>git push -u origin main</a:t>
+                      </a:r>
+                    </a:p>
+                  </a:txBody>
+                  <a:tcPr anchor="ctr"/>
+                </a:tc>
+                <a:tc>
+                  <a:txBody>
+                    <a:bodyPr/>
+                    <a:lstStyle/>
+                    <a:p>
+                      <a:pPr>
+                        <a:buNone/>
+                      </a:pPr>
+                      <a:r>
+                        <a:rPr lang="en-US" dirty="0"/>
+                        <a:t>Push </a:t>
+                      </a:r>
+                      <a:r>
+                        <a:rPr lang="en-US" dirty="0" err="1"/>
+                        <a:t>pannum</a:t>
+                      </a:r>
+                      <a:r>
+                        <a:rPr lang="en-US" dirty="0"/>
+                        <a:t>; upstream tracking-um set </a:t>
+                      </a:r>
+                      <a:r>
+                        <a:rPr lang="en-US" dirty="0" err="1"/>
+                        <a:t>pannum</a:t>
+                      </a:r>
+                      <a:r>
+                        <a:rPr lang="en-US" dirty="0"/>
+                        <a:t>.</a:t>
+                      </a:r>
+                    </a:p>
+                  </a:txBody>
+                  <a:tcPr anchor="ctr"/>
+                </a:tc>
+                <a:extLst>
+                  <a:ext uri="{0D108BD9-81ED-4DB2-BD59-A6C34878D82A}">
+                    <a16:rowId xmlns:a16="http://schemas.microsoft.com/office/drawing/2014/main" val="2717325583"/>
+                  </a:ext>
+                </a:extLst>
+              </a:tr>
+            </a:tbl>
+          </a:graphicData>
+        </a:graphic>
+      </p:graphicFrame>
+    </p:spTree>
+    <p:extLst>
+      <p:ext uri="{BB962C8B-B14F-4D97-AF65-F5344CB8AC3E}">
+        <p14:creationId xmlns:p14="http://schemas.microsoft.com/office/powerpoint/2010/main" val="492793201"/>
       </p:ext>
     </p:extLst>
   </p:cSld>

--- a/Playwright & API.pptx
+++ b/Playwright & API.pptx
@@ -68,6 +68,7 @@
     <p:sldId id="316" r:id="rId62"/>
     <p:sldId id="317" r:id="rId63"/>
     <p:sldId id="318" r:id="rId64"/>
+    <p:sldId id="319" r:id="rId65"/>
   </p:sldIdLst>
   <p:sldSz cx="12192000" cy="6858000"/>
   <p:notesSz cx="6858000" cy="9144000"/>
@@ -177,7 +178,7 @@
 <file path=ppt/revisionInfo.xml><?xml version="1.0" encoding="utf-8"?>
 <p1510:revInfo xmlns:a="http://schemas.openxmlformats.org/drawingml/2006/main" xmlns:r="http://schemas.openxmlformats.org/officeDocument/2006/relationships" xmlns:p1510="http://schemas.microsoft.com/office/powerpoint/2015/10/main">
   <p1510:revLst>
-    <p1510:client id="{31D04B7B-443E-4FC8-BF19-DA33EC8424CB}" v="126" dt="2026-10-26T19:31:46.003"/>
+    <p1510:client id="{31D04B7B-443E-4FC8-BF19-DA33EC8424CB}" v="129" dt="2026-10-26T19:37:51.921"/>
   </p1510:revLst>
 </p1510:revInfo>
 </file>
@@ -187,7 +188,7 @@
   <pc:docChgLst>
     <pc:chgData name="harish1813@gmail.com" userId="613d342206dc88bc" providerId="LiveId" clId="{EEDAE3EB-AEB0-40E8-B4E1-1F7EDC38DCE6}"/>
     <pc:docChg chg="undo redo custSel addSld delSld modSld sldOrd">
-      <pc:chgData name="harish1813@gmail.com" userId="613d342206dc88bc" providerId="LiveId" clId="{EEDAE3EB-AEB0-40E8-B4E1-1F7EDC38DCE6}" dt="2026-10-26T19:32:15.161" v="9939" actId="1076"/>
+      <pc:chgData name="harish1813@gmail.com" userId="613d342206dc88bc" providerId="LiveId" clId="{EEDAE3EB-AEB0-40E8-B4E1-1F7EDC38DCE6}" dt="2026-10-26T19:39:52.131" v="10125" actId="20577"/>
       <pc:docMkLst>
         <pc:docMk/>
       </pc:docMkLst>
@@ -2480,6 +2481,37 @@
           </ac:graphicFrameMkLst>
         </pc:graphicFrameChg>
       </pc:sldChg>
+      <pc:sldChg chg="addSp modSp new mod">
+        <pc:chgData name="harish1813@gmail.com" userId="613d342206dc88bc" providerId="LiveId" clId="{EEDAE3EB-AEB0-40E8-B4E1-1F7EDC38DCE6}" dt="2026-10-26T19:39:52.131" v="10125" actId="20577"/>
+        <pc:sldMkLst>
+          <pc:docMk/>
+          <pc:sldMk cId="2765592957" sldId="319"/>
+        </pc:sldMkLst>
+        <pc:spChg chg="add mod">
+          <ac:chgData name="harish1813@gmail.com" userId="613d342206dc88bc" providerId="LiveId" clId="{EEDAE3EB-AEB0-40E8-B4E1-1F7EDC38DCE6}" dt="2026-10-26T19:39:52.131" v="10125" actId="20577"/>
+          <ac:spMkLst>
+            <pc:docMk/>
+            <pc:sldMk cId="2765592957" sldId="319"/>
+            <ac:spMk id="2" creationId="{AB2414F9-8A9D-A927-C798-7EF760ABF268}"/>
+          </ac:spMkLst>
+        </pc:spChg>
+        <pc:spChg chg="add mod">
+          <ac:chgData name="harish1813@gmail.com" userId="613d342206dc88bc" providerId="LiveId" clId="{EEDAE3EB-AEB0-40E8-B4E1-1F7EDC38DCE6}" dt="2026-10-26T19:37:25.564" v="10032"/>
+          <ac:spMkLst>
+            <pc:docMk/>
+            <pc:sldMk cId="2765592957" sldId="319"/>
+            <ac:spMk id="3" creationId="{C3F14A55-C510-459C-3598-1AD4A7713A1E}"/>
+          </ac:spMkLst>
+        </pc:spChg>
+        <pc:graphicFrameChg chg="add mod">
+          <ac:chgData name="harish1813@gmail.com" userId="613d342206dc88bc" providerId="LiveId" clId="{EEDAE3EB-AEB0-40E8-B4E1-1F7EDC38DCE6}" dt="2026-10-26T19:37:59.586" v="10034" actId="1076"/>
+          <ac:graphicFrameMkLst>
+            <pc:docMk/>
+            <pc:sldMk cId="2765592957" sldId="319"/>
+            <ac:graphicFrameMk id="4" creationId="{DC5A2B08-2788-1D49-2FB5-5028611F4D88}"/>
+          </ac:graphicFrameMkLst>
+        </pc:graphicFrameChg>
+      </pc:sldChg>
     </pc:docChg>
   </pc:docChgLst>
 </pc:chgInfo>
@@ -43504,6 +43536,501 @@
 </p:sld>
 </file>
 
+<file path=ppt/slides/slide64.xml><?xml version="1.0" encoding="utf-8"?>
+<p:sld xmlns:a="http://schemas.openxmlformats.org/drawingml/2006/main" xmlns:r="http://schemas.openxmlformats.org/officeDocument/2006/relationships" xmlns:p="http://schemas.openxmlformats.org/presentationml/2006/main">
+  <p:cSld>
+    <p:spTree>
+      <p:nvGrpSpPr>
+        <p:cNvPr id="1" name=""/>
+        <p:cNvGrpSpPr/>
+        <p:nvPr/>
+      </p:nvGrpSpPr>
+      <p:grpSpPr>
+        <a:xfrm>
+          <a:off x="0" y="0"/>
+          <a:ext cx="0" cy="0"/>
+          <a:chOff x="0" y="0"/>
+          <a:chExt cx="0" cy="0"/>
+        </a:xfrm>
+      </p:grpSpPr>
+      <p:sp>
+        <p:nvSpPr>
+          <p:cNvPr id="2" name="Rectangle 1">
+            <a:extLst>
+              <a:ext uri="{FF2B5EF4-FFF2-40B4-BE49-F238E27FC236}">
+                <a16:creationId xmlns:a16="http://schemas.microsoft.com/office/drawing/2014/main" id="{AB2414F9-8A9D-A927-C798-7EF760ABF268}"/>
+              </a:ext>
+            </a:extLst>
+          </p:cNvPr>
+          <p:cNvSpPr/>
+          <p:nvPr/>
+        </p:nvSpPr>
+        <p:spPr>
+          <a:xfrm>
+            <a:off x="406400" y="296333"/>
+            <a:ext cx="5892800" cy="6019800"/>
+          </a:xfrm>
+          <a:prstGeom prst="rect">
+            <a:avLst/>
+          </a:prstGeom>
+        </p:spPr>
+        <p:style>
+          <a:lnRef idx="2">
+            <a:schemeClr val="accent6"/>
+          </a:lnRef>
+          <a:fillRef idx="1">
+            <a:schemeClr val="lt1"/>
+          </a:fillRef>
+          <a:effectRef idx="0">
+            <a:schemeClr val="accent6"/>
+          </a:effectRef>
+          <a:fontRef idx="minor">
+            <a:schemeClr val="dk1"/>
+          </a:fontRef>
+        </p:style>
+        <p:txBody>
+          <a:bodyPr rtlCol="0" anchor="ctr"/>
+          <a:lstStyle/>
+          <a:p>
+            <a:pPr algn="ctr"/>
+            <a:r>
+              <a:rPr lang="en-US" dirty="0"/>
+              <a:t>git switch -c feature/</a:t>
+            </a:r>
+            <a:r>
+              <a:rPr lang="en-US" dirty="0" err="1"/>
+              <a:t>api</a:t>
+            </a:r>
+            <a:r>
+              <a:rPr lang="en-US" dirty="0"/>
+              <a:t>-documentation</a:t>
+            </a:r>
+          </a:p>
+          <a:p>
+            <a:pPr algn="ctr"/>
+            <a:endParaRPr lang="en-US" dirty="0"/>
+          </a:p>
+          <a:p>
+            <a:pPr algn="ctr"/>
+            <a:r>
+              <a:rPr lang="en-US" dirty="0" err="1"/>
+              <a:t>Ippa</a:t>
+            </a:r>
+            <a:r>
+              <a:rPr lang="en-US" dirty="0"/>
+              <a:t> </a:t>
+            </a:r>
+            <a:r>
+              <a:rPr lang="en-US" dirty="0" err="1"/>
+              <a:t>pudhu</a:t>
+            </a:r>
+            <a:r>
+              <a:rPr lang="en-US" dirty="0"/>
+              <a:t> file </a:t>
+            </a:r>
+            <a:r>
+              <a:rPr lang="en-US" dirty="0" err="1"/>
+              <a:t>onnu</a:t>
+            </a:r>
+            <a:r>
+              <a:rPr lang="en-US" dirty="0"/>
+              <a:t> create </a:t>
+            </a:r>
+            <a:r>
+              <a:rPr lang="en-US" dirty="0" err="1"/>
+              <a:t>panniruka</a:t>
+            </a:r>
+            <a:r>
+              <a:rPr lang="en-US" dirty="0"/>
+              <a:t> UI task nu status check </a:t>
+            </a:r>
+            <a:r>
+              <a:rPr lang="en-US" dirty="0" err="1"/>
+              <a:t>pannina</a:t>
+            </a:r>
+            <a:r>
+              <a:rPr lang="en-US" dirty="0"/>
+              <a:t> untrack nu </a:t>
+            </a:r>
+            <a:r>
+              <a:rPr lang="en-US"/>
+              <a:t>irukhum</a:t>
+            </a:r>
+            <a:br>
+              <a:rPr lang="en-US" dirty="0"/>
+            </a:br>
+            <a:endParaRPr lang="en-US" dirty="0"/>
+          </a:p>
+        </p:txBody>
+      </p:sp>
+      <p:sp>
+        <p:nvSpPr>
+          <p:cNvPr id="3" name="Rectangle 2">
+            <a:extLst>
+              <a:ext uri="{FF2B5EF4-FFF2-40B4-BE49-F238E27FC236}">
+                <a16:creationId xmlns:a16="http://schemas.microsoft.com/office/drawing/2014/main" id="{C3F14A55-C510-459C-3598-1AD4A7713A1E}"/>
+              </a:ext>
+            </a:extLst>
+          </p:cNvPr>
+          <p:cNvSpPr/>
+          <p:nvPr/>
+        </p:nvSpPr>
+        <p:spPr>
+          <a:xfrm>
+            <a:off x="6527800" y="296333"/>
+            <a:ext cx="5384800" cy="6019800"/>
+          </a:xfrm>
+          <a:prstGeom prst="rect">
+            <a:avLst/>
+          </a:prstGeom>
+        </p:spPr>
+        <p:style>
+          <a:lnRef idx="2">
+            <a:schemeClr val="accent6"/>
+          </a:lnRef>
+          <a:fillRef idx="1">
+            <a:schemeClr val="lt1"/>
+          </a:fillRef>
+          <a:effectRef idx="0">
+            <a:schemeClr val="accent6"/>
+          </a:effectRef>
+          <a:fontRef idx="minor">
+            <a:schemeClr val="dk1"/>
+          </a:fontRef>
+        </p:style>
+        <p:txBody>
+          <a:bodyPr rtlCol="0" anchor="ctr"/>
+          <a:lstStyle/>
+          <a:p>
+            <a:pPr algn="ctr"/>
+            <a:r>
+              <a:rPr lang="en-US" dirty="0" err="1"/>
+              <a:t>Pudhu</a:t>
+            </a:r>
+            <a:r>
+              <a:rPr lang="en-US" dirty="0"/>
+              <a:t> branch create </a:t>
+            </a:r>
+            <a:r>
+              <a:rPr lang="en-US" dirty="0" err="1"/>
+              <a:t>pannirukan</a:t>
+            </a:r>
+            <a:r>
+              <a:rPr lang="en-US" dirty="0"/>
+              <a:t> </a:t>
+            </a:r>
+            <a:r>
+              <a:rPr lang="en-US" dirty="0" err="1"/>
+              <a:t>ippa</a:t>
+            </a:r>
+            <a:r>
+              <a:rPr lang="en-US" dirty="0"/>
+              <a:t> git branch nu </a:t>
+            </a:r>
+            <a:r>
+              <a:rPr lang="en-US" dirty="0" err="1"/>
+              <a:t>kudutha</a:t>
+            </a:r>
+            <a:r>
+              <a:rPr lang="en-US" dirty="0"/>
+              <a:t> </a:t>
+            </a:r>
+            <a:r>
+              <a:rPr lang="en-US" dirty="0" err="1"/>
+              <a:t>pudhu</a:t>
+            </a:r>
+            <a:r>
+              <a:rPr lang="en-US" dirty="0"/>
+              <a:t> branch la </a:t>
+            </a:r>
+            <a:r>
+              <a:rPr lang="en-US" dirty="0" err="1"/>
+              <a:t>irukhum</a:t>
+            </a:r>
+            <a:r>
+              <a:rPr lang="en-US" dirty="0"/>
+              <a:t> PS C:\Users\haris\OneDrive\Desktop\compplaywright&gt; git branch</a:t>
+            </a:r>
+          </a:p>
+          <a:p>
+            <a:pPr algn="ctr"/>
+            <a:r>
+              <a:rPr lang="en-US" dirty="0"/>
+              <a:t>* </a:t>
+            </a:r>
+            <a:r>
+              <a:rPr lang="en-US" dirty="0" err="1"/>
+              <a:t>api</a:t>
+            </a:r>
+            <a:r>
+              <a:rPr lang="en-US" dirty="0"/>
+              <a:t>-automation</a:t>
+            </a:r>
+          </a:p>
+          <a:p>
+            <a:pPr algn="ctr"/>
+            <a:r>
+              <a:rPr lang="en-US" dirty="0"/>
+              <a:t>  main</a:t>
+            </a:r>
+          </a:p>
+          <a:p>
+            <a:pPr algn="ctr"/>
+            <a:r>
+              <a:rPr lang="en-US" dirty="0"/>
+              <a:t>PS C:\Users\haris\OneDrive\Desktop\compplaywright&gt; </a:t>
+            </a:r>
+          </a:p>
+        </p:txBody>
+      </p:sp>
+      <p:graphicFrame>
+        <p:nvGraphicFramePr>
+          <p:cNvPr id="4" name="Table 3">
+            <a:extLst>
+              <a:ext uri="{FF2B5EF4-FFF2-40B4-BE49-F238E27FC236}">
+                <a16:creationId xmlns:a16="http://schemas.microsoft.com/office/drawing/2014/main" id="{DC5A2B08-2788-1D49-2FB5-5028611F4D88}"/>
+              </a:ext>
+            </a:extLst>
+          </p:cNvPr>
+          <p:cNvGraphicFramePr>
+            <a:graphicFrameLocks noGrp="1"/>
+          </p:cNvGraphicFramePr>
+          <p:nvPr>
+            <p:extLst>
+              <p:ext uri="{D42A27DB-BD31-4B8C-83A1-F6EECF244321}">
+                <p14:modId xmlns:p14="http://schemas.microsoft.com/office/powerpoint/2010/main" val="784340301"/>
+              </p:ext>
+            </p:extLst>
+          </p:nvPr>
+        </p:nvGraphicFramePr>
+        <p:xfrm>
+          <a:off x="838200" y="5054547"/>
+          <a:ext cx="10515600" cy="1737360"/>
+        </p:xfrm>
+        <a:graphic>
+          <a:graphicData uri="http://schemas.openxmlformats.org/drawingml/2006/table">
+            <a:tbl>
+              <a:tblPr>
+                <a:tableStyleId>{5C22544A-7EE6-4342-B048-85BDC9FD1C3A}</a:tableStyleId>
+              </a:tblPr>
+              <a:tblGrid>
+                <a:gridCol w="5257800">
+                  <a:extLst>
+                    <a:ext uri="{9D8B030D-6E8A-4147-A177-3AD203B41FA5}">
+                      <a16:colId xmlns:a16="http://schemas.microsoft.com/office/drawing/2014/main" val="2714589826"/>
+                    </a:ext>
+                  </a:extLst>
+                </a:gridCol>
+                <a:gridCol w="5257800">
+                  <a:extLst>
+                    <a:ext uri="{9D8B030D-6E8A-4147-A177-3AD203B41FA5}">
+                      <a16:colId xmlns:a16="http://schemas.microsoft.com/office/drawing/2014/main" val="3318308336"/>
+                    </a:ext>
+                  </a:extLst>
+                </a:gridCol>
+              </a:tblGrid>
+              <a:tr h="0">
+                <a:tc>
+                  <a:txBody>
+                    <a:bodyPr/>
+                    <a:lstStyle/>
+                    <a:p>
+                      <a:pPr>
+                        <a:buNone/>
+                      </a:pPr>
+                      <a:r>
+                        <a:rPr lang="en-US"/>
+                        <a:t>Command</a:t>
+                      </a:r>
+                    </a:p>
+                  </a:txBody>
+                  <a:tcPr anchor="ctr"/>
+                </a:tc>
+                <a:tc>
+                  <a:txBody>
+                    <a:bodyPr/>
+                    <a:lstStyle/>
+                    <a:p>
+                      <a:pPr>
+                        <a:buNone/>
+                      </a:pPr>
+                      <a:r>
+                        <a:rPr lang="en-US"/>
+                        <a:t>Meaning</a:t>
+                      </a:r>
+                    </a:p>
+                  </a:txBody>
+                  <a:tcPr anchor="ctr"/>
+                </a:tc>
+                <a:extLst>
+                  <a:ext uri="{0D108BD9-81ED-4DB2-BD59-A6C34878D82A}">
+                    <a16:rowId xmlns:a16="http://schemas.microsoft.com/office/drawing/2014/main" val="2502611759"/>
+                  </a:ext>
+                </a:extLst>
+              </a:tr>
+              <a:tr h="0">
+                <a:tc>
+                  <a:txBody>
+                    <a:bodyPr/>
+                    <a:lstStyle/>
+                    <a:p>
+                      <a:pPr>
+                        <a:buNone/>
+                      </a:pPr>
+                      <a:r>
+                        <a:rPr lang="en-US"/>
+                        <a:t>git switch main</a:t>
+                      </a:r>
+                    </a:p>
+                  </a:txBody>
+                  <a:tcPr anchor="ctr"/>
+                </a:tc>
+                <a:tc>
+                  <a:txBody>
+                    <a:bodyPr/>
+                    <a:lstStyle/>
+                    <a:p>
+                      <a:pPr>
+                        <a:buNone/>
+                      </a:pPr>
+                      <a:r>
+                        <a:rPr lang="en-US"/>
+                        <a:t>Existing main branch-ku switch aagum</a:t>
+                      </a:r>
+                    </a:p>
+                  </a:txBody>
+                  <a:tcPr anchor="ctr"/>
+                </a:tc>
+                <a:extLst>
+                  <a:ext uri="{0D108BD9-81ED-4DB2-BD59-A6C34878D82A}">
+                    <a16:rowId xmlns:a16="http://schemas.microsoft.com/office/drawing/2014/main" val="4102867217"/>
+                  </a:ext>
+                </a:extLst>
+              </a:tr>
+              <a:tr h="0">
+                <a:tc>
+                  <a:txBody>
+                    <a:bodyPr/>
+                    <a:lstStyle/>
+                    <a:p>
+                      <a:pPr>
+                        <a:buNone/>
+                      </a:pPr>
+                      <a:r>
+                        <a:rPr lang="en-US"/>
+                        <a:t>git switch -c api-automation</a:t>
+                      </a:r>
+                    </a:p>
+                  </a:txBody>
+                  <a:tcPr anchor="ctr"/>
+                </a:tc>
+                <a:tc>
+                  <a:txBody>
+                    <a:bodyPr/>
+                    <a:lstStyle/>
+                    <a:p>
+                      <a:pPr>
+                        <a:buNone/>
+                      </a:pPr>
+                      <a:r>
+                        <a:rPr lang="en-US"/>
+                        <a:t>Pudhu branch create panni switch aagum</a:t>
+                      </a:r>
+                    </a:p>
+                  </a:txBody>
+                  <a:tcPr anchor="ctr"/>
+                </a:tc>
+                <a:extLst>
+                  <a:ext uri="{0D108BD9-81ED-4DB2-BD59-A6C34878D82A}">
+                    <a16:rowId xmlns:a16="http://schemas.microsoft.com/office/drawing/2014/main" val="3017579033"/>
+                  </a:ext>
+                </a:extLst>
+              </a:tr>
+              <a:tr h="0">
+                <a:tc>
+                  <a:txBody>
+                    <a:bodyPr/>
+                    <a:lstStyle/>
+                    <a:p>
+                      <a:pPr>
+                        <a:buNone/>
+                      </a:pPr>
+                      <a:r>
+                        <a:rPr lang="en-US"/>
+                        <a:t>git switch api-automation</a:t>
+                      </a:r>
+                    </a:p>
+                  </a:txBody>
+                  <a:tcPr anchor="ctr"/>
+                </a:tc>
+                <a:tc>
+                  <a:txBody>
+                    <a:bodyPr/>
+                    <a:lstStyle/>
+                    <a:p>
+                      <a:pPr>
+                        <a:buNone/>
+                      </a:pPr>
+                      <a:r>
+                        <a:rPr lang="en-US" dirty="0"/>
+                        <a:t>Already </a:t>
+                      </a:r>
+                      <a:r>
+                        <a:rPr lang="en-US" dirty="0" err="1"/>
+                        <a:t>irukkura</a:t>
+                      </a:r>
+                      <a:r>
+                        <a:rPr lang="en-US" dirty="0"/>
+                        <a:t> </a:t>
+                      </a:r>
+                      <a:r>
+                        <a:rPr lang="en-US" dirty="0" err="1"/>
+                        <a:t>api</a:t>
+                      </a:r>
+                      <a:r>
+                        <a:rPr lang="en-US" dirty="0"/>
+                        <a:t>-automation branch-</a:t>
+                      </a:r>
+                      <a:r>
+                        <a:rPr lang="en-US" dirty="0" err="1"/>
+                        <a:t>ku</a:t>
+                      </a:r>
+                      <a:r>
+                        <a:rPr lang="en-US" dirty="0"/>
+                        <a:t> switch </a:t>
+                      </a:r>
+                      <a:r>
+                        <a:rPr lang="en-US" dirty="0" err="1"/>
+                        <a:t>aagum</a:t>
+                      </a:r>
+                      <a:endParaRPr lang="en-US" dirty="0"/>
+                    </a:p>
+                  </a:txBody>
+                  <a:tcPr anchor="ctr"/>
+                </a:tc>
+                <a:extLst>
+                  <a:ext uri="{0D108BD9-81ED-4DB2-BD59-A6C34878D82A}">
+                    <a16:rowId xmlns:a16="http://schemas.microsoft.com/office/drawing/2014/main" val="3547832395"/>
+                  </a:ext>
+                </a:extLst>
+              </a:tr>
+            </a:tbl>
+          </a:graphicData>
+        </a:graphic>
+      </p:graphicFrame>
+    </p:spTree>
+    <p:extLst>
+      <p:ext uri="{BB962C8B-B14F-4D97-AF65-F5344CB8AC3E}">
+        <p14:creationId xmlns:p14="http://schemas.microsoft.com/office/powerpoint/2010/main" val="2765592957"/>
+      </p:ext>
+    </p:extLst>
+  </p:cSld>
+  <p:clrMapOvr>
+    <a:masterClrMapping/>
+  </p:clrMapOvr>
+</p:sld>
+</file>
+
 <file path=ppt/slides/slide7.xml><?xml version="1.0" encoding="utf-8"?>
 <p:sld xmlns:a="http://schemas.openxmlformats.org/drawingml/2006/main" xmlns:r="http://schemas.openxmlformats.org/officeDocument/2006/relationships" xmlns:p="http://schemas.openxmlformats.org/presentationml/2006/main">
   <p:cSld>

--- a/Playwright & API.pptx
+++ b/Playwright & API.pptx
@@ -69,6 +69,7 @@
     <p:sldId id="317" r:id="rId63"/>
     <p:sldId id="318" r:id="rId64"/>
     <p:sldId id="319" r:id="rId65"/>
+    <p:sldId id="320" r:id="rId66"/>
   </p:sldIdLst>
   <p:sldSz cx="12192000" cy="6858000"/>
   <p:notesSz cx="6858000" cy="9144000"/>
@@ -178,7 +179,7 @@
 <file path=ppt/revisionInfo.xml><?xml version="1.0" encoding="utf-8"?>
 <p1510:revInfo xmlns:a="http://schemas.openxmlformats.org/drawingml/2006/main" xmlns:r="http://schemas.openxmlformats.org/officeDocument/2006/relationships" xmlns:p1510="http://schemas.microsoft.com/office/powerpoint/2015/10/main">
   <p1510:revLst>
-    <p1510:client id="{31D04B7B-443E-4FC8-BF19-DA33EC8424CB}" v="129" dt="2026-10-26T19:37:51.921"/>
+    <p1510:client id="{31D04B7B-443E-4FC8-BF19-DA33EC8424CB}" v="132" dt="2026-10-26T19:50:26.225"/>
   </p1510:revLst>
 </p1510:revInfo>
 </file>
@@ -188,7 +189,7 @@
   <pc:docChgLst>
     <pc:chgData name="harish1813@gmail.com" userId="613d342206dc88bc" providerId="LiveId" clId="{EEDAE3EB-AEB0-40E8-B4E1-1F7EDC38DCE6}"/>
     <pc:docChg chg="undo redo custSel addSld delSld modSld sldOrd">
-      <pc:chgData name="harish1813@gmail.com" userId="613d342206dc88bc" providerId="LiveId" clId="{EEDAE3EB-AEB0-40E8-B4E1-1F7EDC38DCE6}" dt="2026-10-26T19:39:52.131" v="10125" actId="20577"/>
+      <pc:chgData name="harish1813@gmail.com" userId="613d342206dc88bc" providerId="LiveId" clId="{EEDAE3EB-AEB0-40E8-B4E1-1F7EDC38DCE6}" dt="2026-10-26T19:51:59.088" v="10559" actId="20577"/>
       <pc:docMkLst>
         <pc:docMk/>
       </pc:docMkLst>
@@ -2482,13 +2483,13 @@
         </pc:graphicFrameChg>
       </pc:sldChg>
       <pc:sldChg chg="addSp modSp new mod">
-        <pc:chgData name="harish1813@gmail.com" userId="613d342206dc88bc" providerId="LiveId" clId="{EEDAE3EB-AEB0-40E8-B4E1-1F7EDC38DCE6}" dt="2026-10-26T19:39:52.131" v="10125" actId="20577"/>
+        <pc:chgData name="harish1813@gmail.com" userId="613d342206dc88bc" providerId="LiveId" clId="{EEDAE3EB-AEB0-40E8-B4E1-1F7EDC38DCE6}" dt="2026-10-26T19:42:29.600" v="10205" actId="20577"/>
         <pc:sldMkLst>
           <pc:docMk/>
           <pc:sldMk cId="2765592957" sldId="319"/>
         </pc:sldMkLst>
         <pc:spChg chg="add mod">
-          <ac:chgData name="harish1813@gmail.com" userId="613d342206dc88bc" providerId="LiveId" clId="{EEDAE3EB-AEB0-40E8-B4E1-1F7EDC38DCE6}" dt="2026-10-26T19:39:52.131" v="10125" actId="20577"/>
+          <ac:chgData name="harish1813@gmail.com" userId="613d342206dc88bc" providerId="LiveId" clId="{EEDAE3EB-AEB0-40E8-B4E1-1F7EDC38DCE6}" dt="2026-10-26T19:42:07.755" v="10128"/>
           <ac:spMkLst>
             <pc:docMk/>
             <pc:sldMk cId="2765592957" sldId="319"/>
@@ -2496,7 +2497,7 @@
           </ac:spMkLst>
         </pc:spChg>
         <pc:spChg chg="add mod">
-          <ac:chgData name="harish1813@gmail.com" userId="613d342206dc88bc" providerId="LiveId" clId="{EEDAE3EB-AEB0-40E8-B4E1-1F7EDC38DCE6}" dt="2026-10-26T19:37:25.564" v="10032"/>
+          <ac:chgData name="harish1813@gmail.com" userId="613d342206dc88bc" providerId="LiveId" clId="{EEDAE3EB-AEB0-40E8-B4E1-1F7EDC38DCE6}" dt="2026-10-26T19:42:29.600" v="10205" actId="20577"/>
           <ac:spMkLst>
             <pc:docMk/>
             <pc:sldMk cId="2765592957" sldId="319"/>
@@ -2511,6 +2512,37 @@
             <ac:graphicFrameMk id="4" creationId="{DC5A2B08-2788-1D49-2FB5-5028611F4D88}"/>
           </ac:graphicFrameMkLst>
         </pc:graphicFrameChg>
+      </pc:sldChg>
+      <pc:sldChg chg="addSp modSp new mod">
+        <pc:chgData name="harish1813@gmail.com" userId="613d342206dc88bc" providerId="LiveId" clId="{EEDAE3EB-AEB0-40E8-B4E1-1F7EDC38DCE6}" dt="2026-10-26T19:51:59.088" v="10559" actId="20577"/>
+        <pc:sldMkLst>
+          <pc:docMk/>
+          <pc:sldMk cId="4195846080" sldId="320"/>
+        </pc:sldMkLst>
+        <pc:spChg chg="add mod">
+          <ac:chgData name="harish1813@gmail.com" userId="613d342206dc88bc" providerId="LiveId" clId="{EEDAE3EB-AEB0-40E8-B4E1-1F7EDC38DCE6}" dt="2026-10-26T19:48:48.287" v="10249" actId="14100"/>
+          <ac:spMkLst>
+            <pc:docMk/>
+            <pc:sldMk cId="4195846080" sldId="320"/>
+            <ac:spMk id="2" creationId="{CF886D0C-8F0C-F7AC-CA92-3091920BA45F}"/>
+          </ac:spMkLst>
+        </pc:spChg>
+        <pc:spChg chg="add mod">
+          <ac:chgData name="harish1813@gmail.com" userId="613d342206dc88bc" providerId="LiveId" clId="{EEDAE3EB-AEB0-40E8-B4E1-1F7EDC38DCE6}" dt="2026-10-26T19:48:43.523" v="10248" actId="20577"/>
+          <ac:spMkLst>
+            <pc:docMk/>
+            <pc:sldMk cId="4195846080" sldId="320"/>
+            <ac:spMk id="3" creationId="{53E2A99E-D517-F938-0DFC-D10BB3345702}"/>
+          </ac:spMkLst>
+        </pc:spChg>
+        <pc:spChg chg="add mod">
+          <ac:chgData name="harish1813@gmail.com" userId="613d342206dc88bc" providerId="LiveId" clId="{EEDAE3EB-AEB0-40E8-B4E1-1F7EDC38DCE6}" dt="2026-10-26T19:51:59.088" v="10559" actId="20577"/>
+          <ac:spMkLst>
+            <pc:docMk/>
+            <pc:sldMk cId="4195846080" sldId="320"/>
+            <ac:spMk id="4" creationId="{6F49A5D2-516C-C016-9167-165375C26D54}"/>
+          </ac:spMkLst>
+        </pc:spChg>
       </pc:sldChg>
     </pc:docChg>
   </pc:docChgLst>
@@ -43653,8 +43685,28 @@
               <a:t> untrack nu </a:t>
             </a:r>
             <a:r>
-              <a:rPr lang="en-US"/>
+              <a:rPr lang="en-US" dirty="0" err="1"/>
               <a:t>irukhum</a:t>
+            </a:r>
+            <a:endParaRPr lang="en-US" dirty="0"/>
+          </a:p>
+          <a:p>
+            <a:pPr algn="ctr"/>
+            <a:endParaRPr lang="en-US" dirty="0"/>
+          </a:p>
+          <a:p>
+            <a:pPr algn="ctr"/>
+            <a:r>
+              <a:rPr lang="en-US" dirty="0"/>
+              <a:t>git push -u origin </a:t>
+            </a:r>
+            <a:r>
+              <a:rPr lang="en-US" dirty="0" err="1"/>
+              <a:t>api</a:t>
+            </a:r>
+            <a:r>
+              <a:rPr lang="en-US" dirty="0"/>
+              <a:t>-automation</a:t>
             </a:r>
             <a:br>
               <a:rPr lang="en-US" dirty="0"/>
@@ -43778,7 +43830,54 @@
             <a:pPr algn="ctr"/>
             <a:r>
               <a:rPr lang="en-US" dirty="0"/>
-              <a:t>PS C:\Users\haris\OneDrive\Desktop\compplaywright&gt; </a:t>
+              <a:t>PS C:\Users\haris\OneDrive\Desktop\compplaywright&gt;</a:t>
+            </a:r>
+          </a:p>
+          <a:p>
+            <a:pPr algn="ctr"/>
+            <a:endParaRPr lang="en-US" dirty="0"/>
+          </a:p>
+          <a:p>
+            <a:pPr algn="ctr"/>
+            <a:r>
+              <a:rPr lang="en-US" dirty="0" err="1"/>
+              <a:t>Ippa</a:t>
+            </a:r>
+            <a:r>
+              <a:rPr lang="en-US" dirty="0"/>
+              <a:t> </a:t>
+            </a:r>
+            <a:r>
+              <a:rPr lang="en-US" dirty="0" err="1"/>
+              <a:t>namma</a:t>
+            </a:r>
+            <a:r>
+              <a:rPr lang="en-US" dirty="0"/>
+              <a:t> </a:t>
+            </a:r>
+            <a:r>
+              <a:rPr lang="en-US" dirty="0" err="1"/>
+              <a:t>pudusa</a:t>
+            </a:r>
+            <a:r>
+              <a:rPr lang="en-US" dirty="0"/>
+              <a:t> create panna branch </a:t>
+            </a:r>
+            <a:r>
+              <a:rPr lang="en-US" dirty="0" err="1"/>
+              <a:t>ku</a:t>
+            </a:r>
+            <a:r>
+              <a:rPr lang="en-US" dirty="0"/>
+              <a:t> upstream set panni push </a:t>
+            </a:r>
+            <a:r>
+              <a:rPr lang="en-US" dirty="0" err="1"/>
+              <a:t>pandrom</a:t>
+            </a:r>
+            <a:r>
+              <a:rPr lang="en-US" dirty="0"/>
+              <a:t> </a:t>
             </a:r>
           </a:p>
         </p:txBody>
@@ -44022,6 +44121,345 @@
     <p:extLst>
       <p:ext uri="{BB962C8B-B14F-4D97-AF65-F5344CB8AC3E}">
         <p14:creationId xmlns:p14="http://schemas.microsoft.com/office/powerpoint/2010/main" val="2765592957"/>
+      </p:ext>
+    </p:extLst>
+  </p:cSld>
+  <p:clrMapOvr>
+    <a:masterClrMapping/>
+  </p:clrMapOvr>
+</p:sld>
+</file>
+
+<file path=ppt/slides/slide65.xml><?xml version="1.0" encoding="utf-8"?>
+<p:sld xmlns:a="http://schemas.openxmlformats.org/drawingml/2006/main" xmlns:r="http://schemas.openxmlformats.org/officeDocument/2006/relationships" xmlns:p="http://schemas.openxmlformats.org/presentationml/2006/main">
+  <p:cSld>
+    <p:spTree>
+      <p:nvGrpSpPr>
+        <p:cNvPr id="1" name=""/>
+        <p:cNvGrpSpPr/>
+        <p:nvPr/>
+      </p:nvGrpSpPr>
+      <p:grpSpPr>
+        <a:xfrm>
+          <a:off x="0" y="0"/>
+          <a:ext cx="0" cy="0"/>
+          <a:chOff x="0" y="0"/>
+          <a:chExt cx="0" cy="0"/>
+        </a:xfrm>
+      </p:grpSpPr>
+      <p:sp>
+        <p:nvSpPr>
+          <p:cNvPr id="2" name="Rectangle 1">
+            <a:extLst>
+              <a:ext uri="{FF2B5EF4-FFF2-40B4-BE49-F238E27FC236}">
+                <a16:creationId xmlns:a16="http://schemas.microsoft.com/office/drawing/2014/main" id="{CF886D0C-8F0C-F7AC-CA92-3091920BA45F}"/>
+              </a:ext>
+            </a:extLst>
+          </p:cNvPr>
+          <p:cNvSpPr/>
+          <p:nvPr/>
+        </p:nvSpPr>
+        <p:spPr>
+          <a:xfrm>
+            <a:off x="643467" y="406400"/>
+            <a:ext cx="6282266" cy="5926667"/>
+          </a:xfrm>
+          <a:prstGeom prst="rect">
+            <a:avLst/>
+          </a:prstGeom>
+        </p:spPr>
+        <p:style>
+          <a:lnRef idx="2">
+            <a:schemeClr val="accent6"/>
+          </a:lnRef>
+          <a:fillRef idx="1">
+            <a:schemeClr val="lt1"/>
+          </a:fillRef>
+          <a:effectRef idx="0">
+            <a:schemeClr val="accent6"/>
+          </a:effectRef>
+          <a:fontRef idx="minor">
+            <a:schemeClr val="dk1"/>
+          </a:fontRef>
+        </p:style>
+        <p:txBody>
+          <a:bodyPr rtlCol="0" anchor="ctr"/>
+          <a:lstStyle/>
+          <a:p>
+            <a:pPr lvl="0"/>
+            <a:r>
+              <a:rPr lang="en-US" dirty="0"/>
+              <a:t>Pull Request = “En changes-ah main branch-la </a:t>
+            </a:r>
+            <a:r>
+              <a:rPr lang="en-US" dirty="0" err="1"/>
+              <a:t>serkka</a:t>
+            </a:r>
+            <a:r>
+              <a:rPr lang="en-US" dirty="0"/>
+              <a:t> permission/review </a:t>
+            </a:r>
+            <a:r>
+              <a:rPr lang="en-US" dirty="0" err="1"/>
+              <a:t>venum</a:t>
+            </a:r>
+            <a:r>
+              <a:rPr lang="en-US" dirty="0"/>
+              <a:t>.”</a:t>
+            </a:r>
+          </a:p>
+          <a:p>
+            <a:pPr lvl="0"/>
+            <a:r>
+              <a:rPr lang="en-US" dirty="0"/>
+              <a:t>Merge = “Seri, </a:t>
+            </a:r>
+            <a:r>
+              <a:rPr lang="en-US" dirty="0" err="1"/>
+              <a:t>indha</a:t>
+            </a:r>
+            <a:r>
+              <a:rPr lang="en-US" dirty="0"/>
+              <a:t> changes-ah main branch-</a:t>
+            </a:r>
+            <a:r>
+              <a:rPr lang="en-US" dirty="0" err="1"/>
+              <a:t>oda</a:t>
+            </a:r>
+            <a:r>
+              <a:rPr lang="en-US" dirty="0"/>
+              <a:t> </a:t>
+            </a:r>
+            <a:r>
+              <a:rPr lang="en-US" dirty="0" err="1"/>
+              <a:t>serthidalam</a:t>
+            </a:r>
+            <a:r>
+              <a:rPr lang="en-US" dirty="0"/>
+              <a:t>.”</a:t>
+            </a:r>
+          </a:p>
+          <a:p>
+            <a:pPr algn="ctr"/>
+            <a:endParaRPr lang="en-US" dirty="0"/>
+          </a:p>
+        </p:txBody>
+      </p:sp>
+      <p:sp>
+        <p:nvSpPr>
+          <p:cNvPr id="3" name="Oval 2">
+            <a:extLst>
+              <a:ext uri="{FF2B5EF4-FFF2-40B4-BE49-F238E27FC236}">
+                <a16:creationId xmlns:a16="http://schemas.microsoft.com/office/drawing/2014/main" id="{53E2A99E-D517-F938-0DFC-D10BB3345702}"/>
+              </a:ext>
+            </a:extLst>
+          </p:cNvPr>
+          <p:cNvSpPr/>
+          <p:nvPr/>
+        </p:nvSpPr>
+        <p:spPr>
+          <a:xfrm>
+            <a:off x="2218267" y="524933"/>
+            <a:ext cx="2565400" cy="516467"/>
+          </a:xfrm>
+          <a:prstGeom prst="ellipse">
+            <a:avLst/>
+          </a:prstGeom>
+        </p:spPr>
+        <p:style>
+          <a:lnRef idx="2">
+            <a:schemeClr val="accent6"/>
+          </a:lnRef>
+          <a:fillRef idx="1">
+            <a:schemeClr val="lt1"/>
+          </a:fillRef>
+          <a:effectRef idx="0">
+            <a:schemeClr val="accent6"/>
+          </a:effectRef>
+          <a:fontRef idx="minor">
+            <a:schemeClr val="dk1"/>
+          </a:fontRef>
+        </p:style>
+        <p:txBody>
+          <a:bodyPr rtlCol="0" anchor="ctr"/>
+          <a:lstStyle/>
+          <a:p>
+            <a:pPr algn="ctr"/>
+            <a:r>
+              <a:rPr lang="en-US" dirty="0"/>
+              <a:t>Compare and pull request</a:t>
+            </a:r>
+          </a:p>
+        </p:txBody>
+      </p:sp>
+      <p:sp>
+        <p:nvSpPr>
+          <p:cNvPr id="4" name="Rectangle 3">
+            <a:extLst>
+              <a:ext uri="{FF2B5EF4-FFF2-40B4-BE49-F238E27FC236}">
+                <a16:creationId xmlns:a16="http://schemas.microsoft.com/office/drawing/2014/main" id="{6F49A5D2-516C-C016-9167-165375C26D54}"/>
+              </a:ext>
+            </a:extLst>
+          </p:cNvPr>
+          <p:cNvSpPr/>
+          <p:nvPr/>
+        </p:nvSpPr>
+        <p:spPr>
+          <a:xfrm>
+            <a:off x="7272867" y="431800"/>
+            <a:ext cx="4766733" cy="5858933"/>
+          </a:xfrm>
+          <a:prstGeom prst="rect">
+            <a:avLst/>
+          </a:prstGeom>
+        </p:spPr>
+        <p:style>
+          <a:lnRef idx="2">
+            <a:schemeClr val="accent6"/>
+          </a:lnRef>
+          <a:fillRef idx="1">
+            <a:schemeClr val="lt1"/>
+          </a:fillRef>
+          <a:effectRef idx="0">
+            <a:schemeClr val="accent6"/>
+          </a:effectRef>
+          <a:fontRef idx="minor">
+            <a:schemeClr val="dk1"/>
+          </a:fontRef>
+        </p:style>
+        <p:txBody>
+          <a:bodyPr rtlCol="0" anchor="ctr"/>
+          <a:lstStyle/>
+          <a:p>
+            <a:pPr algn="ctr"/>
+            <a:r>
+              <a:rPr lang="en-US" dirty="0" err="1"/>
+              <a:t>Namma</a:t>
+            </a:r>
+            <a:r>
+              <a:rPr lang="en-US" dirty="0"/>
+              <a:t> </a:t>
+            </a:r>
+            <a:r>
+              <a:rPr lang="en-US" dirty="0" err="1"/>
+              <a:t>pudusha</a:t>
+            </a:r>
+            <a:r>
+              <a:rPr lang="en-US" dirty="0"/>
+              <a:t> branch create panni push </a:t>
+            </a:r>
+            <a:r>
+              <a:rPr lang="en-US" dirty="0" err="1"/>
+              <a:t>pannadhala</a:t>
+            </a:r>
+            <a:r>
+              <a:rPr lang="en-US" dirty="0"/>
+              <a:t> </a:t>
+            </a:r>
+            <a:r>
+              <a:rPr lang="en-US" dirty="0" err="1"/>
+              <a:t>namma</a:t>
+            </a:r>
+            <a:r>
+              <a:rPr lang="en-US" dirty="0"/>
+              <a:t> </a:t>
+            </a:r>
+            <a:r>
+              <a:rPr lang="en-US" dirty="0" err="1"/>
+              <a:t>github</a:t>
+            </a:r>
+            <a:r>
+              <a:rPr lang="en-US" dirty="0"/>
+              <a:t> repo la compare and pull nu </a:t>
+            </a:r>
+            <a:r>
+              <a:rPr lang="en-US" dirty="0" err="1"/>
+              <a:t>oru</a:t>
+            </a:r>
+            <a:r>
+              <a:rPr lang="en-US" dirty="0"/>
+              <a:t> button enable </a:t>
+            </a:r>
+            <a:r>
+              <a:rPr lang="en-US" dirty="0" err="1"/>
+              <a:t>aairukum</a:t>
+            </a:r>
+            <a:r>
+              <a:rPr lang="en-US" dirty="0"/>
+              <a:t> </a:t>
+            </a:r>
+            <a:r>
+              <a:rPr lang="en-US" dirty="0" err="1"/>
+              <a:t>adha</a:t>
+            </a:r>
+            <a:r>
+              <a:rPr lang="en-US" dirty="0"/>
+              <a:t> click panni title description add panni  </a:t>
+            </a:r>
+            <a:r>
+              <a:rPr lang="en-US" dirty="0" err="1"/>
+              <a:t>Adhukku</a:t>
+            </a:r>
+            <a:r>
+              <a:rPr lang="en-US" dirty="0"/>
+              <a:t> </a:t>
+            </a:r>
+            <a:r>
+              <a:rPr lang="en-US" dirty="0" err="1"/>
+              <a:t>appuram</a:t>
+            </a:r>
+            <a:r>
+              <a:rPr lang="en-US" dirty="0"/>
+              <a:t> Create pull request button click </a:t>
+            </a:r>
+            <a:r>
+              <a:rPr lang="en-US" dirty="0" err="1"/>
+              <a:t>pannu</a:t>
+            </a:r>
+            <a:r>
+              <a:rPr lang="en-US" dirty="0"/>
+              <a:t>.</a:t>
+            </a:r>
+            <a:br>
+              <a:rPr lang="en-US" dirty="0"/>
+            </a:br>
+            <a:br>
+              <a:rPr lang="en-US" dirty="0"/>
+            </a:br>
+            <a:r>
+              <a:rPr lang="en-US" dirty="0" err="1"/>
+              <a:t>Ippa</a:t>
+            </a:r>
+            <a:r>
+              <a:rPr lang="en-US" dirty="0"/>
+              <a:t> checking for availability nu </a:t>
+            </a:r>
+            <a:r>
+              <a:rPr lang="en-US" dirty="0" err="1"/>
+              <a:t>poitu</a:t>
+            </a:r>
+            <a:r>
+              <a:rPr lang="en-US" dirty="0"/>
+              <a:t> </a:t>
+            </a:r>
+            <a:br>
+              <a:rPr lang="en-US" dirty="0"/>
+            </a:br>
+            <a:r>
+              <a:rPr lang="en-US" dirty="0"/>
+              <a:t>merge pull request button enable </a:t>
+            </a:r>
+            <a:r>
+              <a:rPr lang="en-US"/>
+              <a:t>aagum</a:t>
+            </a:r>
+          </a:p>
+        </p:txBody>
+      </p:sp>
+    </p:spTree>
+    <p:extLst>
+      <p:ext uri="{BB962C8B-B14F-4D97-AF65-F5344CB8AC3E}">
+        <p14:creationId xmlns:p14="http://schemas.microsoft.com/office/powerpoint/2010/main" val="4195846080"/>
       </p:ext>
     </p:extLst>
   </p:cSld>

--- a/Playwright & API.pptx
+++ b/Playwright & API.pptx
@@ -44450,9 +44450,10 @@
               <a:t>merge pull request button enable </a:t>
             </a:r>
             <a:r>
-              <a:rPr lang="en-US"/>
+              <a:rPr lang="en-US" dirty="0" err="1"/>
               <a:t>aagum</a:t>
             </a:r>
+            <a:endParaRPr lang="en-US" dirty="0"/>
           </a:p>
         </p:txBody>
       </p:sp>
